--- a/presentation/final/Presentacion_Final_Churn_Redesign.pptx
+++ b/presentation/final/Presentacion_Final_Churn_Redesign.pptx
@@ -3172,7 +3172,7 @@
               </a:defRPr>
             </a:pPr>
             <a:r>
-              <a:t>ANALISIS PREDICTIVO · EXAMEN FINAL</a:t>
+              <a:t>ANALISIS PREDICTIVO - EXAMEN FINAL</a:t>
             </a:r>
           </a:p>
         </p:txBody>
@@ -3221,7 +3221,7 @@
         <p:spPr>
           <a:xfrm>
             <a:off x="585216" y="1920240"/>
-            <a:ext cx="6217920" cy="320040"/>
+            <a:ext cx="6675120" cy="320040"/>
           </a:xfrm>
           <a:prstGeom prst="rect">
             <a:avLst/>
@@ -3242,7 +3242,7 @@
               </a:defRPr>
             </a:pPr>
             <a:r>
-              <a:t>Modelo final CatBoost · seleccion por PR-AUC · umbral optimizado por F2</a:t>
+              <a:t>Caso de negocio, modelo predictivo y accion comercial sobre clientes con riesgo de baja</a:t>
             </a:r>
           </a:p>
         </p:txBody>
@@ -3307,7 +3307,7 @@
             <a:avLst/>
           </a:prstGeom>
           <a:solidFill>
-            <a:srgbClr val="E77E37"/>
+            <a:srgbClr val="229799"/>
           </a:solidFill>
           <a:ln>
             <a:noFill/>
@@ -3365,7 +3365,7 @@
               </a:defRPr>
             </a:pPr>
             <a:r>
-              <a:t>CHURN</a:t>
+              <a:t>CLIENTES</a:t>
             </a:r>
           </a:p>
         </p:txBody>
@@ -3400,7 +3400,7 @@
               </a:defRPr>
             </a:pPr>
             <a:r>
-              <a:t>26.5%</a:t>
+              <a:t>7.043</a:t>
             </a:r>
           </a:p>
         </p:txBody>
@@ -3435,7 +3435,7 @@
               </a:defRPr>
             </a:pPr>
             <a:r>
-              <a:t>tasa observada</a:t>
+              <a:t>dataset IBM</a:t>
             </a:r>
           </a:p>
         </p:txBody>
@@ -3500,7 +3500,7 @@
             <a:avLst/>
           </a:prstGeom>
           <a:solidFill>
-            <a:srgbClr val="229799"/>
+            <a:srgbClr val="E77E37"/>
           </a:solidFill>
           <a:ln>
             <a:noFill/>
@@ -3558,7 +3558,7 @@
               </a:defRPr>
             </a:pPr>
             <a:r>
-              <a:t>CLIENTES</a:t>
+              <a:t>CHURN</a:t>
             </a:r>
           </a:p>
         </p:txBody>
@@ -3593,7 +3593,7 @@
               </a:defRPr>
             </a:pPr>
             <a:r>
-              <a:t>7.043</a:t>
+              <a:t>26.5%</a:t>
             </a:r>
           </a:p>
         </p:txBody>
@@ -3628,7 +3628,7 @@
               </a:defRPr>
             </a:pPr>
             <a:r>
-              <a:t>dataset IBM</a:t>
+              <a:t>1869 clientes</a:t>
             </a:r>
           </a:p>
         </p:txBody>
@@ -3751,7 +3751,7 @@
               </a:defRPr>
             </a:pPr>
             <a:r>
-              <a:t>PR-AUC TEST</a:t>
+              <a:t>MODELO</a:t>
             </a:r>
           </a:p>
         </p:txBody>
@@ -3786,7 +3786,7 @@
               </a:defRPr>
             </a:pPr>
             <a:r>
-              <a:t>0.664</a:t>
+              <a:t>CatBoost</a:t>
             </a:r>
           </a:p>
         </p:txBody>
@@ -3821,7 +3821,7 @@
               </a:defRPr>
             </a:pPr>
             <a:r>
-              <a:t>modelo final</a:t>
+              <a:t>mejor PR-AUC</a:t>
             </a:r>
           </a:p>
         </p:txBody>
@@ -4014,7 +4014,7 @@
               </a:defRPr>
             </a:pPr>
             <a:r>
-              <a:t>umbral 0.31</a:t>
+              <a:t>test</a:t>
             </a:r>
           </a:p>
         </p:txBody>
@@ -4153,7 +4153,7 @@
               </a:defRPr>
             </a:pPr>
             <a:r>
-              <a:t>7 · MODELO FINAL</a:t>
+              <a:t>7 - MODELO FINAL</a:t>
             </a:r>
           </a:p>
         </p:txBody>
@@ -4188,7 +4188,7 @@
               </a:defRPr>
             </a:pPr>
             <a:r>
-              <a:t>Interpretacion: contrato, tenure y señales de servicio</a:t>
+              <a:t>Interpretacion: consistente con el EDA</a:t>
             </a:r>
           </a:p>
         </p:txBody>
@@ -4244,7 +4244,7 @@
         </p:blipFill>
         <p:spPr>
           <a:xfrm>
-            <a:off x="502920" y="1143000"/>
+            <a:off x="502920" y="1078992"/>
             <a:ext cx="4251960" cy="2572392"/>
           </a:xfrm>
           <a:prstGeom prst="rect">
@@ -4268,7 +4268,7 @@
         </p:blipFill>
         <p:spPr>
           <a:xfrm>
-            <a:off x="4617720" y="1143000"/>
+            <a:off x="4617720" y="1078992"/>
             <a:ext cx="4160520" cy="2517071"/>
           </a:xfrm>
           <a:prstGeom prst="rect">
@@ -4284,8 +4284,8 @@
         </p:nvSpPr>
         <p:spPr>
           <a:xfrm>
-            <a:off x="777240" y="4434840"/>
-            <a:ext cx="7498079" cy="320040"/>
+            <a:off x="777240" y="4370832"/>
+            <a:ext cx="7543800" cy="438912"/>
           </a:xfrm>
           <a:prstGeom prst="rect">
             <a:avLst/>
@@ -4306,7 +4306,7 @@
               </a:defRPr>
             </a:pPr>
             <a:r>
-              <a:t>Permutation importance esta alineada a F2; SHAP resume impacto global. No es causalidad: es señal predictiva para priorizar.</a:t>
+              <a:t>Conclusion: contrato mensual, baja antiguedad, cargos acumulados y senales de soporte/seguridad vuelven a aparecer como drivers predictivos. Esto coincide con el EDA, pero no implica causalidad.</a:t>
             </a:r>
           </a:p>
         </p:txBody>
@@ -4445,7 +4445,7 @@
               </a:defRPr>
             </a:pPr>
             <a:r>
-              <a:t>8 · LIMITACIONES / MEJORAS</a:t>
+              <a:t>8 - LIMITACIONES / MEJORAS</a:t>
             </a:r>
           </a:p>
         </p:txBody>
@@ -4480,7 +4480,7 @@
               </a:defRPr>
             </a:pPr>
             <a:r>
-              <a:t>La mayor mejora no es otro algoritmo: son datos y decision</a:t>
+              <a:t>Que falta para llevarlo a una decision productiva</a:t>
             </a:r>
           </a:p>
         </p:txBody>
@@ -4528,8 +4528,43 @@
         </p:nvSpPr>
         <p:spPr>
           <a:xfrm>
-            <a:off x="731520" y="1325880"/>
-            <a:ext cx="7589520" cy="2286000"/>
+            <a:off x="685800" y="1234440"/>
+            <a:ext cx="3474720" cy="274320"/>
+          </a:xfrm>
+          <a:prstGeom prst="rect">
+            <a:avLst/>
+          </a:prstGeom>
+          <a:noFill/>
+        </p:spPr>
+        <p:txBody>
+          <a:bodyPr wrap="square" lIns="27432" rIns="27432" tIns="9144">
+            <a:spAutoFit/>
+          </a:bodyPr>
+          <a:lstStyle/>
+          <a:p>
+            <a:pPr>
+              <a:defRPr sz="1600" b="1">
+                <a:solidFill>
+                  <a:srgbClr val="161C27"/>
+                </a:solidFill>
+              </a:defRPr>
+            </a:pPr>
+            <a:r>
+              <a:t>Limitaciones</a:t>
+            </a:r>
+          </a:p>
+        </p:txBody>
+      </p:sp>
+      <p:sp>
+        <p:nvSpPr>
+          <p:cNvPr id="8" name="TextBox 7"/>
+          <p:cNvSpPr txBox="1"/>
+          <p:nvPr/>
+        </p:nvSpPr>
+        <p:spPr>
+          <a:xfrm>
+            <a:off x="685800" y="1664208"/>
+            <a:ext cx="3657600" cy="2514600"/>
           </a:xfrm>
           <a:prstGeom prst="rect">
             <a:avLst/>
@@ -4546,14 +4581,14 @@
               <a:spcAft>
                 <a:spcPts val="500"/>
               </a:spcAft>
-              <a:defRPr sz="1300">
+              <a:defRPr sz="1150">
                 <a:solidFill>
                   <a:srgbClr val="161C27"/>
                 </a:solidFill>
               </a:defRPr>
             </a:pPr>
             <a:r>
-              <a:t>No hay corte temporal real: validar con meses futuros seria la mejora metodologica mas importante.</a:t>
+              <a:t>Dataset sin dimension temporal: no simula pasado a futuro.</a:t>
             </a:r>
           </a:p>
           <a:p>
@@ -4561,14 +4596,14 @@
               <a:spcAft>
                 <a:spcPts val="500"/>
               </a:spcAft>
-              <a:defRPr sz="1300">
+              <a:defRPr sz="1150">
                 <a:solidFill>
                   <a:srgbClr val="161C27"/>
                 </a:solidFill>
               </a:defRPr>
             </a:pPr>
             <a:r>
-              <a:t>Precision moderada: el umbral debe ajustarse con costos reales y capacidad comercial.</a:t>
+              <a:t>No hay costos reales de contacto, oferta ni perdida de cliente.</a:t>
             </a:r>
           </a:p>
           <a:p>
@@ -4576,14 +4611,14 @@
               <a:spcAft>
                 <a:spcPts val="500"/>
               </a:spcAft>
-              <a:defRPr sz="1300">
+              <a:defRPr sz="1150">
                 <a:solidFill>
                   <a:srgbClr val="161C27"/>
                 </a:solidFill>
               </a:defRPr>
             </a:pPr>
             <a:r>
-              <a:t>Variables redundantes: algunas originales y derivadas comparten informacion.</a:t>
+              <a:t>Precision moderada: muchas acciones comerciales no terminarian en churn real.</a:t>
             </a:r>
           </a:p>
           <a:p>
@@ -4591,14 +4626,14 @@
               <a:spcAft>
                 <a:spcPts val="500"/>
               </a:spcAft>
-              <a:defRPr sz="1300">
+              <a:defRPr sz="1150">
                 <a:solidFill>
                   <a:srgbClr val="161C27"/>
                 </a:solidFill>
               </a:defRPr>
             </a:pPr>
             <a:r>
-              <a:t>Agregar reclamos, uso real, tickets, promociones, cambios de plan y satisfaccion.</a:t>
+              <a:t>Variables redundantes entre originales y derivadas pueden repartir importancia.</a:t>
             </a:r>
           </a:p>
           <a:p>
@@ -4606,103 +4641,50 @@
               <a:spcAft>
                 <a:spcPts val="500"/>
               </a:spcAft>
-              <a:defRPr sz="1300">
+              <a:defRPr sz="1150">
                 <a:solidFill>
                   <a:srgbClr val="161C27"/>
                 </a:solidFill>
               </a:defRPr>
             </a:pPr>
             <a:r>
-              <a:t>Uplift modeling: contactar clientes persuadibles, no solo clientes con alto riesgo.</a:t>
-            </a:r>
-          </a:p>
-        </p:txBody>
-      </p:sp>
-      <p:sp>
-        <p:nvSpPr>
-          <p:cNvPr id="8" name="Rectangle 7"/>
-          <p:cNvSpPr/>
-          <p:nvPr/>
-        </p:nvSpPr>
-        <p:spPr>
-          <a:xfrm>
-            <a:off x="822960" y="3886200"/>
-            <a:ext cx="2286000" cy="777240"/>
-          </a:xfrm>
-          <a:prstGeom prst="rect">
-            <a:avLst/>
-          </a:prstGeom>
-          <a:solidFill>
-            <a:srgbClr val="FFFFFF"/>
-          </a:solidFill>
-          <a:ln>
-            <a:solidFill>
-              <a:srgbClr val="DCE2EB"/>
-            </a:solidFill>
-          </a:ln>
-        </p:spPr>
-        <p:style>
-          <a:lnRef idx="1">
-            <a:schemeClr val="accent1"/>
-          </a:lnRef>
-          <a:fillRef idx="3">
-            <a:schemeClr val="accent1"/>
-          </a:fillRef>
-          <a:effectRef idx="2">
-            <a:schemeClr val="accent1"/>
-          </a:effectRef>
-          <a:fontRef idx="minor">
-            <a:schemeClr val="lt1"/>
-          </a:fontRef>
-        </p:style>
-        <p:txBody>
-          <a:bodyPr rtlCol="0" anchor="ctr"/>
-          <a:lstStyle/>
-          <a:p>
-            <a:pPr algn="ctr"/>
-          </a:p>
-        </p:txBody>
-      </p:sp>
-      <p:sp>
-        <p:nvSpPr>
-          <p:cNvPr id="9" name="Rectangle 8"/>
-          <p:cNvSpPr/>
-          <p:nvPr/>
-        </p:nvSpPr>
-        <p:spPr>
-          <a:xfrm>
-            <a:off x="822960" y="3886200"/>
-            <a:ext cx="2286000" cy="73152"/>
-          </a:xfrm>
-          <a:prstGeom prst="rect">
-            <a:avLst/>
-          </a:prstGeom>
-          <a:solidFill>
-            <a:srgbClr val="3C9A60"/>
-          </a:solidFill>
-          <a:ln>
-            <a:noFill/>
-          </a:ln>
-        </p:spPr>
-        <p:style>
-          <a:lnRef idx="1">
-            <a:schemeClr val="accent1"/>
-          </a:lnRef>
-          <a:fillRef idx="3">
-            <a:schemeClr val="accent1"/>
-          </a:fillRef>
-          <a:effectRef idx="2">
-            <a:schemeClr val="accent1"/>
-          </a:effectRef>
-          <a:fontRef idx="minor">
-            <a:schemeClr val="lt1"/>
-          </a:fontRef>
-        </p:style>
-        <p:txBody>
-          <a:bodyPr rtlCol="0" anchor="ctr"/>
-          <a:lstStyle/>
-          <a:p>
-            <a:pPr algn="ctr"/>
+              <a:t>No hay datos de reclamos, uso, satisfaccion ni competencia.</a:t>
+            </a:r>
+          </a:p>
+        </p:txBody>
+      </p:sp>
+      <p:sp>
+        <p:nvSpPr>
+          <p:cNvPr id="9" name="TextBox 8"/>
+          <p:cNvSpPr txBox="1"/>
+          <p:nvPr/>
+        </p:nvSpPr>
+        <p:spPr>
+          <a:xfrm>
+            <a:off x="4800600" y="1234440"/>
+            <a:ext cx="3474720" cy="274320"/>
+          </a:xfrm>
+          <a:prstGeom prst="rect">
+            <a:avLst/>
+          </a:prstGeom>
+          <a:noFill/>
+        </p:spPr>
+        <p:txBody>
+          <a:bodyPr wrap="square" lIns="27432" rIns="27432" tIns="9144">
+            <a:spAutoFit/>
+          </a:bodyPr>
+          <a:lstStyle/>
+          <a:p>
+            <a:pPr>
+              <a:defRPr sz="1600" b="1">
+                <a:solidFill>
+                  <a:srgbClr val="161C27"/>
+                </a:solidFill>
+              </a:defRPr>
+            </a:pPr>
+            <a:r>
+              <a:t>Posibles mejoras</a:t>
+            </a:r>
           </a:p>
         </p:txBody>
       </p:sp>
@@ -4714,485 +4696,92 @@
         </p:nvSpPr>
         <p:spPr>
           <a:xfrm>
-            <a:off x="960120" y="4032504"/>
-            <a:ext cx="2011680" cy="201168"/>
-          </a:xfrm>
-          <a:prstGeom prst="rect">
-            <a:avLst/>
-          </a:prstGeom>
-          <a:noFill/>
-        </p:spPr>
-        <p:txBody>
-          <a:bodyPr wrap="square" lIns="27432" rIns="27432" tIns="9144">
-            <a:spAutoFit/>
-          </a:bodyPr>
-          <a:lstStyle/>
-          <a:p>
-            <a:pPr>
-              <a:defRPr sz="819" b="1">
-                <a:solidFill>
-                  <a:srgbClr val="5E6877"/>
-                </a:solidFill>
-              </a:defRPr>
-            </a:pPr>
-            <a:r>
-              <a:t>LEAKAGE</a:t>
-            </a:r>
-          </a:p>
-        </p:txBody>
-      </p:sp>
-      <p:sp>
-        <p:nvSpPr>
-          <p:cNvPr id="11" name="TextBox 10"/>
-          <p:cNvSpPr txBox="1"/>
-          <p:nvPr/>
-        </p:nvSpPr>
-        <p:spPr>
-          <a:xfrm>
-            <a:off x="960120" y="4270248"/>
-            <a:ext cx="2011680" cy="384048"/>
-          </a:xfrm>
-          <a:prstGeom prst="rect">
-            <a:avLst/>
-          </a:prstGeom>
-          <a:noFill/>
-        </p:spPr>
-        <p:txBody>
-          <a:bodyPr wrap="square" lIns="27432" rIns="27432" tIns="9144">
-            <a:spAutoFit/>
-          </a:bodyPr>
-          <a:lstStyle/>
-          <a:p>
-            <a:pPr>
-              <a:defRPr sz="2000" b="1">
+            <a:off x="4800600" y="1664208"/>
+            <a:ext cx="3657600" cy="2514600"/>
+          </a:xfrm>
+          <a:prstGeom prst="rect">
+            <a:avLst/>
+          </a:prstGeom>
+          <a:noFill/>
+        </p:spPr>
+        <p:txBody>
+          <a:bodyPr wrap="square">
+            <a:spAutoFit/>
+          </a:bodyPr>
+          <a:lstStyle/>
+          <a:p>
+            <a:pPr>
+              <a:spcAft>
+                <a:spcPts val="500"/>
+              </a:spcAft>
+              <a:defRPr sz="1150">
                 <a:solidFill>
                   <a:srgbClr val="161C27"/>
                 </a:solidFill>
               </a:defRPr>
             </a:pPr>
             <a:r>
-              <a:t>sin señal grave</a:t>
-            </a:r>
-          </a:p>
-        </p:txBody>
-      </p:sp>
-      <p:sp>
-        <p:nvSpPr>
-          <p:cNvPr id="12" name="TextBox 11"/>
-          <p:cNvSpPr txBox="1"/>
-          <p:nvPr/>
-        </p:nvSpPr>
-        <p:spPr>
-          <a:xfrm>
-            <a:off x="960120" y="4672584"/>
-            <a:ext cx="2011680" cy="-45720"/>
-          </a:xfrm>
-          <a:prstGeom prst="rect">
-            <a:avLst/>
-          </a:prstGeom>
-          <a:noFill/>
-        </p:spPr>
-        <p:txBody>
-          <a:bodyPr wrap="square" lIns="27432" rIns="27432" tIns="9144">
-            <a:spAutoFit/>
-          </a:bodyPr>
-          <a:lstStyle/>
-          <a:p>
-            <a:pPr>
-              <a:defRPr sz="919" b="0">
-                <a:solidFill>
-                  <a:srgbClr val="5E6877"/>
-                </a:solidFill>
-              </a:defRPr>
-            </a:pPr>
-            <a:r>
-              <a:t>ID fuera, target fuera, pipeline por fold</a:t>
-            </a:r>
-          </a:p>
-        </p:txBody>
-      </p:sp>
-      <p:sp>
-        <p:nvSpPr>
-          <p:cNvPr id="13" name="Rectangle 12"/>
-          <p:cNvSpPr/>
-          <p:nvPr/>
-        </p:nvSpPr>
-        <p:spPr>
-          <a:xfrm>
-            <a:off x="3429000" y="3886200"/>
-            <a:ext cx="2286000" cy="777240"/>
-          </a:xfrm>
-          <a:prstGeom prst="rect">
-            <a:avLst/>
-          </a:prstGeom>
-          <a:solidFill>
-            <a:srgbClr val="FFFFFF"/>
-          </a:solidFill>
-          <a:ln>
-            <a:solidFill>
-              <a:srgbClr val="DCE2EB"/>
-            </a:solidFill>
-          </a:ln>
-        </p:spPr>
-        <p:style>
-          <a:lnRef idx="1">
-            <a:schemeClr val="accent1"/>
-          </a:lnRef>
-          <a:fillRef idx="3">
-            <a:schemeClr val="accent1"/>
-          </a:fillRef>
-          <a:effectRef idx="2">
-            <a:schemeClr val="accent1"/>
-          </a:effectRef>
-          <a:fontRef idx="minor">
-            <a:schemeClr val="lt1"/>
-          </a:fontRef>
-        </p:style>
-        <p:txBody>
-          <a:bodyPr rtlCol="0" anchor="ctr"/>
-          <a:lstStyle/>
-          <a:p>
-            <a:pPr algn="ctr"/>
-          </a:p>
-        </p:txBody>
-      </p:sp>
-      <p:sp>
-        <p:nvSpPr>
-          <p:cNvPr id="14" name="Rectangle 13"/>
-          <p:cNvSpPr/>
-          <p:nvPr/>
-        </p:nvSpPr>
-        <p:spPr>
-          <a:xfrm>
-            <a:off x="3429000" y="3886200"/>
-            <a:ext cx="2286000" cy="73152"/>
-          </a:xfrm>
-          <a:prstGeom prst="rect">
-            <a:avLst/>
-          </a:prstGeom>
-          <a:solidFill>
-            <a:srgbClr val="2356C2"/>
-          </a:solidFill>
-          <a:ln>
-            <a:noFill/>
-          </a:ln>
-        </p:spPr>
-        <p:style>
-          <a:lnRef idx="1">
-            <a:schemeClr val="accent1"/>
-          </a:lnRef>
-          <a:fillRef idx="3">
-            <a:schemeClr val="accent1"/>
-          </a:fillRef>
-          <a:effectRef idx="2">
-            <a:schemeClr val="accent1"/>
-          </a:effectRef>
-          <a:fontRef idx="minor">
-            <a:schemeClr val="lt1"/>
-          </a:fontRef>
-        </p:style>
-        <p:txBody>
-          <a:bodyPr rtlCol="0" anchor="ctr"/>
-          <a:lstStyle/>
-          <a:p>
-            <a:pPr algn="ctr"/>
-          </a:p>
-        </p:txBody>
-      </p:sp>
-      <p:sp>
-        <p:nvSpPr>
-          <p:cNvPr id="15" name="TextBox 14"/>
-          <p:cNvSpPr txBox="1"/>
-          <p:nvPr/>
-        </p:nvSpPr>
-        <p:spPr>
-          <a:xfrm>
-            <a:off x="3566160" y="4032504"/>
-            <a:ext cx="2011680" cy="201168"/>
-          </a:xfrm>
-          <a:prstGeom prst="rect">
-            <a:avLst/>
-          </a:prstGeom>
-          <a:noFill/>
-        </p:spPr>
-        <p:txBody>
-          <a:bodyPr wrap="square" lIns="27432" rIns="27432" tIns="9144">
-            <a:spAutoFit/>
-          </a:bodyPr>
-          <a:lstStyle/>
-          <a:p>
-            <a:pPr>
-              <a:defRPr sz="819" b="1">
-                <a:solidFill>
-                  <a:srgbClr val="5E6877"/>
-                </a:solidFill>
-              </a:defRPr>
-            </a:pPr>
-            <a:r>
-              <a:t>OVERFIT</a:t>
-            </a:r>
-          </a:p>
-        </p:txBody>
-      </p:sp>
-      <p:sp>
-        <p:nvSpPr>
-          <p:cNvPr id="16" name="TextBox 15"/>
-          <p:cNvSpPr txBox="1"/>
-          <p:nvPr/>
-        </p:nvSpPr>
-        <p:spPr>
-          <a:xfrm>
-            <a:off x="3566160" y="4270248"/>
-            <a:ext cx="2011680" cy="384048"/>
-          </a:xfrm>
-          <a:prstGeom prst="rect">
-            <a:avLst/>
-          </a:prstGeom>
-          <a:noFill/>
-        </p:spPr>
-        <p:txBody>
-          <a:bodyPr wrap="square" lIns="27432" rIns="27432" tIns="9144">
-            <a:spAutoFit/>
-          </a:bodyPr>
-          <a:lstStyle/>
-          <a:p>
-            <a:pPr>
-              <a:defRPr sz="2000" b="1">
+              <a:t>Validar con meses futuros y monitorear drift.</a:t>
+            </a:r>
+          </a:p>
+          <a:p>
+            <a:pPr>
+              <a:spcAft>
+                <a:spcPts val="500"/>
+              </a:spcAft>
+              <a:defRPr sz="1150">
                 <a:solidFill>
                   <a:srgbClr val="161C27"/>
                 </a:solidFill>
               </a:defRPr>
             </a:pPr>
             <a:r>
-              <a:t>controlado</a:t>
-            </a:r>
-          </a:p>
-        </p:txBody>
-      </p:sp>
-      <p:sp>
-        <p:nvSpPr>
-          <p:cNvPr id="17" name="TextBox 16"/>
-          <p:cNvSpPr txBox="1"/>
-          <p:nvPr/>
-        </p:nvSpPr>
-        <p:spPr>
-          <a:xfrm>
-            <a:off x="3566160" y="4672584"/>
-            <a:ext cx="2011680" cy="-45720"/>
-          </a:xfrm>
-          <a:prstGeom prst="rect">
-            <a:avLst/>
-          </a:prstGeom>
-          <a:noFill/>
-        </p:spPr>
-        <p:txBody>
-          <a:bodyPr wrap="square" lIns="27432" rIns="27432" tIns="9144">
-            <a:spAutoFit/>
-          </a:bodyPr>
-          <a:lstStyle/>
-          <a:p>
-            <a:pPr>
-              <a:defRPr sz="919" b="0">
-                <a:solidFill>
-                  <a:srgbClr val="5E6877"/>
-                </a:solidFill>
-              </a:defRPr>
-            </a:pPr>
-            <a:r>
-              <a:t>gap F2 bajo/moderado</a:t>
-            </a:r>
-          </a:p>
-        </p:txBody>
-      </p:sp>
-      <p:sp>
-        <p:nvSpPr>
-          <p:cNvPr id="18" name="Rectangle 17"/>
-          <p:cNvSpPr/>
-          <p:nvPr/>
-        </p:nvSpPr>
-        <p:spPr>
-          <a:xfrm>
-            <a:off x="6035040" y="3886200"/>
-            <a:ext cx="2286000" cy="777240"/>
-          </a:xfrm>
-          <a:prstGeom prst="rect">
-            <a:avLst/>
-          </a:prstGeom>
-          <a:solidFill>
-            <a:srgbClr val="FFFFFF"/>
-          </a:solidFill>
-          <a:ln>
-            <a:solidFill>
-              <a:srgbClr val="DCE2EB"/>
-            </a:solidFill>
-          </a:ln>
-        </p:spPr>
-        <p:style>
-          <a:lnRef idx="1">
-            <a:schemeClr val="accent1"/>
-          </a:lnRef>
-          <a:fillRef idx="3">
-            <a:schemeClr val="accent1"/>
-          </a:fillRef>
-          <a:effectRef idx="2">
-            <a:schemeClr val="accent1"/>
-          </a:effectRef>
-          <a:fontRef idx="minor">
-            <a:schemeClr val="lt1"/>
-          </a:fontRef>
-        </p:style>
-        <p:txBody>
-          <a:bodyPr rtlCol="0" anchor="ctr"/>
-          <a:lstStyle/>
-          <a:p>
-            <a:pPr algn="ctr"/>
-          </a:p>
-        </p:txBody>
-      </p:sp>
-      <p:sp>
-        <p:nvSpPr>
-          <p:cNvPr id="19" name="Rectangle 18"/>
-          <p:cNvSpPr/>
-          <p:nvPr/>
-        </p:nvSpPr>
-        <p:spPr>
-          <a:xfrm>
-            <a:off x="6035040" y="3886200"/>
-            <a:ext cx="2286000" cy="73152"/>
-          </a:xfrm>
-          <a:prstGeom prst="rect">
-            <a:avLst/>
-          </a:prstGeom>
-          <a:solidFill>
-            <a:srgbClr val="E77E37"/>
-          </a:solidFill>
-          <a:ln>
-            <a:noFill/>
-          </a:ln>
-        </p:spPr>
-        <p:style>
-          <a:lnRef idx="1">
-            <a:schemeClr val="accent1"/>
-          </a:lnRef>
-          <a:fillRef idx="3">
-            <a:schemeClr val="accent1"/>
-          </a:fillRef>
-          <a:effectRef idx="2">
-            <a:schemeClr val="accent1"/>
-          </a:effectRef>
-          <a:fontRef idx="minor">
-            <a:schemeClr val="lt1"/>
-          </a:fontRef>
-        </p:style>
-        <p:txBody>
-          <a:bodyPr rtlCol="0" anchor="ctr"/>
-          <a:lstStyle/>
-          <a:p>
-            <a:pPr algn="ctr"/>
-          </a:p>
-        </p:txBody>
-      </p:sp>
-      <p:sp>
-        <p:nvSpPr>
-          <p:cNvPr id="20" name="TextBox 19"/>
-          <p:cNvSpPr txBox="1"/>
-          <p:nvPr/>
-        </p:nvSpPr>
-        <p:spPr>
-          <a:xfrm>
-            <a:off x="6172200" y="4032504"/>
-            <a:ext cx="2011680" cy="201168"/>
-          </a:xfrm>
-          <a:prstGeom prst="rect">
-            <a:avLst/>
-          </a:prstGeom>
-          <a:noFill/>
-        </p:spPr>
-        <p:txBody>
-          <a:bodyPr wrap="square" lIns="27432" rIns="27432" tIns="9144">
-            <a:spAutoFit/>
-          </a:bodyPr>
-          <a:lstStyle/>
-          <a:p>
-            <a:pPr>
-              <a:defRPr sz="819" b="1">
-                <a:solidFill>
-                  <a:srgbClr val="5E6877"/>
-                </a:solidFill>
-              </a:defRPr>
-            </a:pPr>
-            <a:r>
-              <a:t>PROXIMO PASO</a:t>
-            </a:r>
-          </a:p>
-        </p:txBody>
-      </p:sp>
-      <p:sp>
-        <p:nvSpPr>
-          <p:cNvPr id="21" name="TextBox 20"/>
-          <p:cNvSpPr txBox="1"/>
-          <p:nvPr/>
-        </p:nvSpPr>
-        <p:spPr>
-          <a:xfrm>
-            <a:off x="6172200" y="4270248"/>
-            <a:ext cx="2011680" cy="384048"/>
-          </a:xfrm>
-          <a:prstGeom prst="rect">
-            <a:avLst/>
-          </a:prstGeom>
-          <a:noFill/>
-        </p:spPr>
-        <p:txBody>
-          <a:bodyPr wrap="square" lIns="27432" rIns="27432" tIns="9144">
-            <a:spAutoFit/>
-          </a:bodyPr>
-          <a:lstStyle/>
-          <a:p>
-            <a:pPr>
-              <a:defRPr sz="2000" b="1">
+              <a:t>Elegir umbral por valor esperado: probabilidad x valor cliente x efectividad x costo.</a:t>
+            </a:r>
+          </a:p>
+          <a:p>
+            <a:pPr>
+              <a:spcAft>
+                <a:spcPts val="500"/>
+              </a:spcAft>
+              <a:defRPr sz="1150">
                 <a:solidFill>
                   <a:srgbClr val="161C27"/>
                 </a:solidFill>
               </a:defRPr>
             </a:pPr>
             <a:r>
-              <a:t>costos</a:t>
-            </a:r>
-          </a:p>
-        </p:txBody>
-      </p:sp>
-      <p:sp>
-        <p:nvSpPr>
-          <p:cNvPr id="22" name="TextBox 21"/>
-          <p:cNvSpPr txBox="1"/>
-          <p:nvPr/>
-        </p:nvSpPr>
-        <p:spPr>
-          <a:xfrm>
-            <a:off x="6172200" y="4672584"/>
-            <a:ext cx="2011680" cy="-45720"/>
-          </a:xfrm>
-          <a:prstGeom prst="rect">
-            <a:avLst/>
-          </a:prstGeom>
-          <a:noFill/>
-        </p:spPr>
-        <p:txBody>
-          <a:bodyPr wrap="square" lIns="27432" rIns="27432" tIns="9144">
-            <a:spAutoFit/>
-          </a:bodyPr>
-          <a:lstStyle/>
-          <a:p>
-            <a:pPr>
-              <a:defRPr sz="919" b="0">
-                <a:solidFill>
-                  <a:srgbClr val="5E6877"/>
-                </a:solidFill>
-              </a:defRPr>
-            </a:pPr>
-            <a:r>
-              <a:t>umbral por valor esperado</a:t>
+              <a:t>Agregar tickets, NPS, uso de servicio, promociones y cambios de plan.</a:t>
+            </a:r>
+          </a:p>
+          <a:p>
+            <a:pPr>
+              <a:spcAft>
+                <a:spcPts val="500"/>
+              </a:spcAft>
+              <a:defRPr sz="1150">
+                <a:solidFill>
+                  <a:srgbClr val="161C27"/>
+                </a:solidFill>
+              </a:defRPr>
+            </a:pPr>
+            <a:r>
+              <a:t>Calibrar probabilidades si el score se usa como ranking economico.</a:t>
+            </a:r>
+          </a:p>
+          <a:p>
+            <a:pPr>
+              <a:spcAft>
+                <a:spcPts val="500"/>
+              </a:spcAft>
+              <a:defRPr sz="1150">
+                <a:solidFill>
+                  <a:srgbClr val="161C27"/>
+                </a:solidFill>
+              </a:defRPr>
+            </a:pPr>
+            <a:r>
+              <a:t>Probar uplift modeling para contactar clientes persuadibles.</a:t>
             </a:r>
           </a:p>
         </p:txBody>
@@ -5331,7 +4920,7 @@
               </a:defRPr>
             </a:pPr>
             <a:r>
-              <a:t>9 · CONCLUSIONES</a:t>
+              <a:t>9 - CONCLUSIONES</a:t>
             </a:r>
           </a:p>
         </p:txBody>
@@ -5366,7 +4955,7 @@
               </a:defRPr>
             </a:pPr>
             <a:r>
-              <a:t>Un ranking accionable para retencion</a:t>
+              <a:t>Un ranking accionable para priorizar retencion</a:t>
             </a:r>
           </a:p>
         </p:txBody>
@@ -5414,8 +5003,8 @@
         </p:nvSpPr>
         <p:spPr>
           <a:xfrm>
-            <a:off x="685800" y="1234440"/>
-            <a:ext cx="2148840" cy="960120"/>
+            <a:off x="640080" y="1143000"/>
+            <a:ext cx="1828800" cy="868680"/>
           </a:xfrm>
           <a:prstGeom prst="rect">
             <a:avLst/>
@@ -5459,14 +5048,14 @@
         </p:nvSpPr>
         <p:spPr>
           <a:xfrm>
-            <a:off x="685800" y="1234440"/>
-            <a:ext cx="2148840" cy="73152"/>
+            <a:off x="640080" y="1143000"/>
+            <a:ext cx="1828800" cy="73152"/>
           </a:xfrm>
           <a:prstGeom prst="rect">
             <a:avLst/>
           </a:prstGeom>
           <a:solidFill>
-            <a:srgbClr val="2356C2"/>
+            <a:srgbClr val="E77E37"/>
           </a:solidFill>
           <a:ln>
             <a:noFill/>
@@ -5502,8 +5091,8 @@
         </p:nvSpPr>
         <p:spPr>
           <a:xfrm>
-            <a:off x="822960" y="1380744"/>
-            <a:ext cx="1874520" cy="201168"/>
+            <a:off x="777240" y="1289304"/>
+            <a:ext cx="1554480" cy="201168"/>
           </a:xfrm>
           <a:prstGeom prst="rect">
             <a:avLst/>
@@ -5524,7 +5113,7 @@
               </a:defRPr>
             </a:pPr>
             <a:r>
-              <a:t>METODO</a:t>
+              <a:t>Mejor modelo</a:t>
             </a:r>
           </a:p>
         </p:txBody>
@@ -5537,8 +5126,8 @@
         </p:nvSpPr>
         <p:spPr>
           <a:xfrm>
-            <a:off x="822960" y="1618488"/>
-            <a:ext cx="1874520" cy="384048"/>
+            <a:off x="777240" y="1527048"/>
+            <a:ext cx="1554480" cy="384048"/>
           </a:xfrm>
           <a:prstGeom prst="rect">
             <a:avLst/>
@@ -5559,7 +5148,7 @@
               </a:defRPr>
             </a:pPr>
             <a:r>
-              <a:t>PR-AUC + F2</a:t>
+              <a:t>CatBoost</a:t>
             </a:r>
           </a:p>
         </p:txBody>
@@ -5572,8 +5161,8 @@
         </p:nvSpPr>
         <p:spPr>
           <a:xfrm>
-            <a:off x="822960" y="2020824"/>
-            <a:ext cx="1874520" cy="137160"/>
+            <a:off x="777240" y="1929384"/>
+            <a:ext cx="1554480" cy="45719"/>
           </a:xfrm>
           <a:prstGeom prst="rect">
             <a:avLst/>
@@ -5594,7 +5183,7 @@
               </a:defRPr>
             </a:pPr>
             <a:r>
-              <a:t>ranking y decision</a:t>
+              <a:t>mejor PR-AUC en CV</a:t>
             </a:r>
           </a:p>
         </p:txBody>
@@ -5607,8 +5196,8 @@
         </p:nvSpPr>
         <p:spPr>
           <a:xfrm>
-            <a:off x="3108960" y="1234440"/>
-            <a:ext cx="2148840" cy="960120"/>
+            <a:off x="2743200" y="1143000"/>
+            <a:ext cx="1645920" cy="868680"/>
           </a:xfrm>
           <a:prstGeom prst="rect">
             <a:avLst/>
@@ -5652,14 +5241,14 @@
         </p:nvSpPr>
         <p:spPr>
           <a:xfrm>
-            <a:off x="3108960" y="1234440"/>
-            <a:ext cx="2148840" cy="73152"/>
+            <a:off x="2743200" y="1143000"/>
+            <a:ext cx="1645920" cy="73152"/>
           </a:xfrm>
           <a:prstGeom prst="rect">
             <a:avLst/>
           </a:prstGeom>
           <a:solidFill>
-            <a:srgbClr val="E77E37"/>
+            <a:srgbClr val="2356C2"/>
           </a:solidFill>
           <a:ln>
             <a:noFill/>
@@ -5695,8 +5284,8 @@
         </p:nvSpPr>
         <p:spPr>
           <a:xfrm>
-            <a:off x="3246120" y="1380744"/>
-            <a:ext cx="1874520" cy="201168"/>
+            <a:off x="2880360" y="1289304"/>
+            <a:ext cx="1371600" cy="201168"/>
           </a:xfrm>
           <a:prstGeom prst="rect">
             <a:avLst/>
@@ -5717,7 +5306,7 @@
               </a:defRPr>
             </a:pPr>
             <a:r>
-              <a:t>MODELO</a:t>
+              <a:t>PR-AUC test</a:t>
             </a:r>
           </a:p>
         </p:txBody>
@@ -5730,8 +5319,8 @@
         </p:nvSpPr>
         <p:spPr>
           <a:xfrm>
-            <a:off x="3246120" y="1618488"/>
-            <a:ext cx="1874520" cy="384048"/>
+            <a:off x="2880360" y="1527048"/>
+            <a:ext cx="1371600" cy="384048"/>
           </a:xfrm>
           <a:prstGeom prst="rect">
             <a:avLst/>
@@ -5752,7 +5341,7 @@
               </a:defRPr>
             </a:pPr>
             <a:r>
-              <a:t>CatBoost</a:t>
+              <a:t>0.664</a:t>
             </a:r>
           </a:p>
         </p:txBody>
@@ -5765,8 +5354,8 @@
         </p:nvSpPr>
         <p:spPr>
           <a:xfrm>
-            <a:off x="3246120" y="2020824"/>
-            <a:ext cx="1874520" cy="137160"/>
+            <a:off x="2880360" y="1929384"/>
+            <a:ext cx="1371600" cy="45719"/>
           </a:xfrm>
           <a:prstGeom prst="rect">
             <a:avLst/>
@@ -5787,7 +5376,7 @@
               </a:defRPr>
             </a:pPr>
             <a:r>
-              <a:t>mejor CV</a:t>
+              <a:t>ranking</a:t>
             </a:r>
           </a:p>
         </p:txBody>
@@ -5800,8 +5389,8 @@
         </p:nvSpPr>
         <p:spPr>
           <a:xfrm>
-            <a:off x="5532120" y="1234440"/>
-            <a:ext cx="2148840" cy="960120"/>
+            <a:off x="4663440" y="1143000"/>
+            <a:ext cx="1645920" cy="868680"/>
           </a:xfrm>
           <a:prstGeom prst="rect">
             <a:avLst/>
@@ -5845,8 +5434,8 @@
         </p:nvSpPr>
         <p:spPr>
           <a:xfrm>
-            <a:off x="5532120" y="1234440"/>
-            <a:ext cx="2148840" cy="73152"/>
+            <a:off x="4663440" y="1143000"/>
+            <a:ext cx="1645920" cy="73152"/>
           </a:xfrm>
           <a:prstGeom prst="rect">
             <a:avLst/>
@@ -5888,8 +5477,8 @@
         </p:nvSpPr>
         <p:spPr>
           <a:xfrm>
-            <a:off x="5669280" y="1380744"/>
-            <a:ext cx="1874520" cy="201168"/>
+            <a:off x="4800600" y="1289304"/>
+            <a:ext cx="1371600" cy="201168"/>
           </a:xfrm>
           <a:prstGeom prst="rect">
             <a:avLst/>
@@ -5910,7 +5499,7 @@
               </a:defRPr>
             </a:pPr>
             <a:r>
-              <a:t>NEGOCIO</a:t>
+              <a:t>Recall</a:t>
             </a:r>
           </a:p>
         </p:txBody>
@@ -5923,8 +5512,8 @@
         </p:nvSpPr>
         <p:spPr>
           <a:xfrm>
-            <a:off x="5669280" y="1618488"/>
-            <a:ext cx="1874520" cy="384048"/>
+            <a:off x="4800600" y="1527048"/>
+            <a:ext cx="1371600" cy="384048"/>
           </a:xfrm>
           <a:prstGeom prst="rect">
             <a:avLst/>
@@ -5945,7 +5534,7 @@
               </a:defRPr>
             </a:pPr>
             <a:r>
-              <a:t>priorizar</a:t>
+              <a:t>90.9%</a:t>
             </a:r>
           </a:p>
         </p:txBody>
@@ -5958,8 +5547,8 @@
         </p:nvSpPr>
         <p:spPr>
           <a:xfrm>
-            <a:off x="5669280" y="2020824"/>
-            <a:ext cx="1874520" cy="137160"/>
+            <a:off x="4800600" y="1929384"/>
+            <a:ext cx="1371600" cy="45719"/>
           </a:xfrm>
           <a:prstGeom prst="rect">
             <a:avLst/>
@@ -5980,21 +5569,214 @@
               </a:defRPr>
             </a:pPr>
             <a:r>
-              <a:t>agenda de retencion</a:t>
-            </a:r>
-          </a:p>
-        </p:txBody>
-      </p:sp>
-      <p:sp>
-        <p:nvSpPr>
-          <p:cNvPr id="22" name="TextBox 21"/>
-          <p:cNvSpPr txBox="1"/>
-          <p:nvPr/>
-        </p:nvSpPr>
-        <p:spPr>
-          <a:xfrm>
-            <a:off x="868680" y="2743200"/>
-            <a:ext cx="7406640" cy="1325880"/>
+              <a:t>churn detectado</a:t>
+            </a:r>
+          </a:p>
+        </p:txBody>
+      </p:sp>
+      <p:sp>
+        <p:nvSpPr>
+          <p:cNvPr id="22" name="Rectangle 21"/>
+          <p:cNvSpPr/>
+          <p:nvPr/>
+        </p:nvSpPr>
+        <p:spPr>
+          <a:xfrm>
+            <a:off x="6583680" y="1143000"/>
+            <a:ext cx="1645920" cy="868680"/>
+          </a:xfrm>
+          <a:prstGeom prst="rect">
+            <a:avLst/>
+          </a:prstGeom>
+          <a:solidFill>
+            <a:srgbClr val="FFFFFF"/>
+          </a:solidFill>
+          <a:ln>
+            <a:solidFill>
+              <a:srgbClr val="DCE2EB"/>
+            </a:solidFill>
+          </a:ln>
+        </p:spPr>
+        <p:style>
+          <a:lnRef idx="1">
+            <a:schemeClr val="accent1"/>
+          </a:lnRef>
+          <a:fillRef idx="3">
+            <a:schemeClr val="accent1"/>
+          </a:fillRef>
+          <a:effectRef idx="2">
+            <a:schemeClr val="accent1"/>
+          </a:effectRef>
+          <a:fontRef idx="minor">
+            <a:schemeClr val="lt1"/>
+          </a:fontRef>
+        </p:style>
+        <p:txBody>
+          <a:bodyPr rtlCol="0" anchor="ctr"/>
+          <a:lstStyle/>
+          <a:p>
+            <a:pPr algn="ctr"/>
+          </a:p>
+        </p:txBody>
+      </p:sp>
+      <p:sp>
+        <p:nvSpPr>
+          <p:cNvPr id="23" name="Rectangle 22"/>
+          <p:cNvSpPr/>
+          <p:nvPr/>
+        </p:nvSpPr>
+        <p:spPr>
+          <a:xfrm>
+            <a:off x="6583680" y="1143000"/>
+            <a:ext cx="1645920" cy="73152"/>
+          </a:xfrm>
+          <a:prstGeom prst="rect">
+            <a:avLst/>
+          </a:prstGeom>
+          <a:solidFill>
+            <a:srgbClr val="C84752"/>
+          </a:solidFill>
+          <a:ln>
+            <a:noFill/>
+          </a:ln>
+        </p:spPr>
+        <p:style>
+          <a:lnRef idx="1">
+            <a:schemeClr val="accent1"/>
+          </a:lnRef>
+          <a:fillRef idx="3">
+            <a:schemeClr val="accent1"/>
+          </a:fillRef>
+          <a:effectRef idx="2">
+            <a:schemeClr val="accent1"/>
+          </a:effectRef>
+          <a:fontRef idx="minor">
+            <a:schemeClr val="lt1"/>
+          </a:fontRef>
+        </p:style>
+        <p:txBody>
+          <a:bodyPr rtlCol="0" anchor="ctr"/>
+          <a:lstStyle/>
+          <a:p>
+            <a:pPr algn="ctr"/>
+          </a:p>
+        </p:txBody>
+      </p:sp>
+      <p:sp>
+        <p:nvSpPr>
+          <p:cNvPr id="24" name="TextBox 23"/>
+          <p:cNvSpPr txBox="1"/>
+          <p:nvPr/>
+        </p:nvSpPr>
+        <p:spPr>
+          <a:xfrm>
+            <a:off x="6720840" y="1289304"/>
+            <a:ext cx="1371600" cy="201168"/>
+          </a:xfrm>
+          <a:prstGeom prst="rect">
+            <a:avLst/>
+          </a:prstGeom>
+          <a:noFill/>
+        </p:spPr>
+        <p:txBody>
+          <a:bodyPr wrap="square" lIns="27432" rIns="27432" tIns="9144">
+            <a:spAutoFit/>
+          </a:bodyPr>
+          <a:lstStyle/>
+          <a:p>
+            <a:pPr>
+              <a:defRPr sz="819" b="1">
+                <a:solidFill>
+                  <a:srgbClr val="5E6877"/>
+                </a:solidFill>
+              </a:defRPr>
+            </a:pPr>
+            <a:r>
+              <a:t>Precision</a:t>
+            </a:r>
+          </a:p>
+        </p:txBody>
+      </p:sp>
+      <p:sp>
+        <p:nvSpPr>
+          <p:cNvPr id="25" name="TextBox 24"/>
+          <p:cNvSpPr txBox="1"/>
+          <p:nvPr/>
+        </p:nvSpPr>
+        <p:spPr>
+          <a:xfrm>
+            <a:off x="6720840" y="1527048"/>
+            <a:ext cx="1371600" cy="384048"/>
+          </a:xfrm>
+          <a:prstGeom prst="rect">
+            <a:avLst/>
+          </a:prstGeom>
+          <a:noFill/>
+        </p:spPr>
+        <p:txBody>
+          <a:bodyPr wrap="square" lIns="27432" rIns="27432" tIns="9144">
+            <a:spAutoFit/>
+          </a:bodyPr>
+          <a:lstStyle/>
+          <a:p>
+            <a:pPr>
+              <a:defRPr sz="2000" b="1">
+                <a:solidFill>
+                  <a:srgbClr val="161C27"/>
+                </a:solidFill>
+              </a:defRPr>
+            </a:pPr>
+            <a:r>
+              <a:t>42.4%</a:t>
+            </a:r>
+          </a:p>
+        </p:txBody>
+      </p:sp>
+      <p:sp>
+        <p:nvSpPr>
+          <p:cNvPr id="26" name="TextBox 25"/>
+          <p:cNvSpPr txBox="1"/>
+          <p:nvPr/>
+        </p:nvSpPr>
+        <p:spPr>
+          <a:xfrm>
+            <a:off x="6720840" y="1929384"/>
+            <a:ext cx="1371600" cy="45719"/>
+          </a:xfrm>
+          <a:prstGeom prst="rect">
+            <a:avLst/>
+          </a:prstGeom>
+          <a:noFill/>
+        </p:spPr>
+        <p:txBody>
+          <a:bodyPr wrap="square" lIns="27432" rIns="27432" tIns="9144">
+            <a:spAutoFit/>
+          </a:bodyPr>
+          <a:lstStyle/>
+          <a:p>
+            <a:pPr>
+              <a:defRPr sz="919" b="0">
+                <a:solidFill>
+                  <a:srgbClr val="5E6877"/>
+                </a:solidFill>
+              </a:defRPr>
+            </a:pPr>
+            <a:r>
+              <a:t>contactos utiles</a:t>
+            </a:r>
+          </a:p>
+        </p:txBody>
+      </p:sp>
+      <p:sp>
+        <p:nvSpPr>
+          <p:cNvPr id="27" name="TextBox 26"/>
+          <p:cNvSpPr txBox="1"/>
+          <p:nvPr/>
+        </p:nvSpPr>
+        <p:spPr>
+          <a:xfrm>
+            <a:off x="822960" y="2606040"/>
+            <a:ext cx="7498079" cy="1417320"/>
           </a:xfrm>
           <a:prstGeom prst="rect">
             <a:avLst/>
@@ -6011,14 +5793,14 @@
               <a:spcAft>
                 <a:spcPts val="500"/>
               </a:spcAft>
-              <a:defRPr sz="1350">
+              <a:defRPr sz="1300">
                 <a:solidFill>
                   <a:srgbClr val="161C27"/>
                 </a:solidFill>
               </a:defRPr>
             </a:pPr>
             <a:r>
-              <a:t>El churn se concentra en perfiles con contrato mensual, baja antiguedad y menor anclaje de servicios.</a:t>
+              <a:t>El modelo permite ordenar clientes por riesgo y priorizar una agenda de retencion.</a:t>
             </a:r>
           </a:p>
           <a:p>
@@ -6026,14 +5808,14 @@
               <a:spcAft>
                 <a:spcPts val="500"/>
               </a:spcAft>
-              <a:defRPr sz="1350">
+              <a:defRPr sz="1300">
                 <a:solidFill>
                   <a:srgbClr val="161C27"/>
                 </a:solidFill>
               </a:defRPr>
             </a:pPr>
             <a:r>
-              <a:t>CatBoost fue el mejor modelo por PR-AUC dentro de 10 pruebas comparables.</a:t>
+              <a:t>Los perfiles de mayor riesgo combinan contrato mensual, baja antiguedad y menor anclaje de servicios.</a:t>
             </a:r>
           </a:p>
           <a:p>
@@ -6041,14 +5823,14 @@
               <a:spcAft>
                 <a:spcPts val="500"/>
               </a:spcAft>
-              <a:defRPr sz="1350">
+              <a:defRPr sz="1300">
                 <a:solidFill>
                   <a:srgbClr val="161C27"/>
                 </a:solidFill>
               </a:defRPr>
             </a:pPr>
             <a:r>
-              <a:t>El umbral actual prioriza recall; debe calibrarse con costos y capacidad real.</a:t>
+              <a:t>Accion sugerida: contactar primero clientes de alto score con propuestas de permanencia, soporte o beneficios segun valor del cliente.</a:t>
             </a:r>
           </a:p>
           <a:p>
@@ -6056,14 +5838,14 @@
               <a:spcAft>
                 <a:spcPts val="500"/>
               </a:spcAft>
-              <a:defRPr sz="1350">
+              <a:defRPr sz="1300">
                 <a:solidFill>
                   <a:srgbClr val="161C27"/>
                 </a:solidFill>
               </a:defRPr>
             </a:pPr>
             <a:r>
-              <a:t>El modelo es una herramienta de priorizacion, no una explicacion causal del abandono.</a:t>
+              <a:t>Antes de produccion: definir costo de accion, capacidad del equipo y umbral por rentabilidad esperada.</a:t>
             </a:r>
           </a:p>
         </p:txBody>
@@ -6202,7 +5984,7 @@
               </a:defRPr>
             </a:pPr>
             <a:r>
-              <a:t>1 · CASO DE NEGOCIO</a:t>
+              <a:t>1 - CASO DE NEGOCIO</a:t>
             </a:r>
           </a:p>
         </p:txBody>
@@ -6237,7 +6019,7 @@
               </a:defRPr>
             </a:pPr>
             <a:r>
-              <a:t>Priorizar retencion antes de que ocurra la baja</a:t>
+              <a:t>Predecir churn para priorizar retencion rentable</a:t>
             </a:r>
           </a:p>
         </p:txBody>
@@ -6279,97 +6061,14 @@
       </p:sp>
       <p:sp>
         <p:nvSpPr>
-          <p:cNvPr id="7" name="TextBox 6"/>
-          <p:cNvSpPr txBox="1"/>
-          <p:nvPr/>
-        </p:nvSpPr>
-        <p:spPr>
-          <a:xfrm>
-            <a:off x="640080" y="1325880"/>
-            <a:ext cx="4754880" cy="2057400"/>
-          </a:xfrm>
-          <a:prstGeom prst="rect">
-            <a:avLst/>
-          </a:prstGeom>
-          <a:noFill/>
-        </p:spPr>
-        <p:txBody>
-          <a:bodyPr wrap="square">
-            <a:spAutoFit/>
-          </a:bodyPr>
-          <a:lstStyle/>
-          <a:p>
-            <a:pPr>
-              <a:spcAft>
-                <a:spcPts val="500"/>
-              </a:spcAft>
-              <a:defRPr sz="1400">
-                <a:solidFill>
-                  <a:srgbClr val="161C27"/>
-                </a:solidFill>
-              </a:defRPr>
-            </a:pPr>
-            <a:r>
-              <a:t>Objetivo: estimar riesgo de churn por cliente activo.</a:t>
-            </a:r>
-          </a:p>
-          <a:p>
-            <a:pPr>
-              <a:spcAft>
-                <a:spcPts val="500"/>
-              </a:spcAft>
-              <a:defRPr sz="1400">
-                <a:solidFill>
-                  <a:srgbClr val="161C27"/>
-                </a:solidFill>
-              </a:defRPr>
-            </a:pPr>
-            <a:r>
-              <a:t>Decision: ordenar la cartera para acciones de retencion.</a:t>
-            </a:r>
-          </a:p>
-          <a:p>
-            <a:pPr>
-              <a:spcAft>
-                <a:spcPts val="500"/>
-              </a:spcAft>
-              <a:defRPr sz="1400">
-                <a:solidFill>
-                  <a:srgbClr val="161C27"/>
-                </a:solidFill>
-              </a:defRPr>
-            </a:pPr>
-            <a:r>
-              <a:t>Valor: usar datos de contrato, servicios y facturacion para llegar antes.</a:t>
-            </a:r>
-          </a:p>
-          <a:p>
-            <a:pPr>
-              <a:spcAft>
-                <a:spcPts val="500"/>
-              </a:spcAft>
-              <a:defRPr sz="1400">
-                <a:solidFill>
-                  <a:srgbClr val="161C27"/>
-                </a:solidFill>
-              </a:defRPr>
-            </a:pPr>
-            <a:r>
-              <a:t>Trade-off: priorizamos recall, pero monitoreamos precision para no sobreactuar.</a:t>
-            </a:r>
-          </a:p>
-        </p:txBody>
-      </p:sp>
-      <p:sp>
-        <p:nvSpPr>
-          <p:cNvPr id="8" name="Rectangle 7"/>
+          <p:cNvPr id="7" name="Rectangle 6"/>
           <p:cNvSpPr/>
           <p:nvPr/>
         </p:nvSpPr>
         <p:spPr>
           <a:xfrm>
-            <a:off x="5806440" y="1325880"/>
-            <a:ext cx="2377440" cy="868680"/>
+            <a:off x="594360" y="1207008"/>
+            <a:ext cx="1920240" cy="868680"/>
           </a:xfrm>
           <a:prstGeom prst="rect">
             <a:avLst/>
@@ -6407,20 +6106,20 @@
       </p:sp>
       <p:sp>
         <p:nvSpPr>
-          <p:cNvPr id="9" name="Rectangle 8"/>
+          <p:cNvPr id="8" name="Rectangle 7"/>
           <p:cNvSpPr/>
           <p:nvPr/>
         </p:nvSpPr>
         <p:spPr>
           <a:xfrm>
-            <a:off x="5806440" y="1325880"/>
-            <a:ext cx="2377440" cy="73152"/>
+            <a:off x="594360" y="1207008"/>
+            <a:ext cx="1920240" cy="73152"/>
           </a:xfrm>
           <a:prstGeom prst="rect">
             <a:avLst/>
           </a:prstGeom>
           <a:solidFill>
-            <a:srgbClr val="2356C2"/>
+            <a:srgbClr val="E77E37"/>
           </a:solidFill>
           <a:ln>
             <a:noFill/>
@@ -6450,119 +6149,119 @@
       </p:sp>
       <p:sp>
         <p:nvSpPr>
+          <p:cNvPr id="9" name="TextBox 8"/>
+          <p:cNvSpPr txBox="1"/>
+          <p:nvPr/>
+        </p:nvSpPr>
+        <p:spPr>
+          <a:xfrm>
+            <a:off x="731520" y="1353312"/>
+            <a:ext cx="1645920" cy="201168"/>
+          </a:xfrm>
+          <a:prstGeom prst="rect">
+            <a:avLst/>
+          </a:prstGeom>
+          <a:noFill/>
+        </p:spPr>
+        <p:txBody>
+          <a:bodyPr wrap="square" lIns="27432" rIns="27432" tIns="9144">
+            <a:spAutoFit/>
+          </a:bodyPr>
+          <a:lstStyle/>
+          <a:p>
+            <a:pPr>
+              <a:defRPr sz="819" b="1">
+                <a:solidFill>
+                  <a:srgbClr val="5E6877"/>
+                </a:solidFill>
+              </a:defRPr>
+            </a:pPr>
+            <a:r>
+              <a:t>TARGET</a:t>
+            </a:r>
+          </a:p>
+        </p:txBody>
+      </p:sp>
+      <p:sp>
+        <p:nvSpPr>
           <p:cNvPr id="10" name="TextBox 9"/>
           <p:cNvSpPr txBox="1"/>
           <p:nvPr/>
         </p:nvSpPr>
         <p:spPr>
           <a:xfrm>
-            <a:off x="5943600" y="1472184"/>
-            <a:ext cx="2103120" cy="201168"/>
-          </a:xfrm>
-          <a:prstGeom prst="rect">
-            <a:avLst/>
-          </a:prstGeom>
-          <a:noFill/>
-        </p:spPr>
-        <p:txBody>
-          <a:bodyPr wrap="square" lIns="27432" rIns="27432" tIns="9144">
-            <a:spAutoFit/>
-          </a:bodyPr>
-          <a:lstStyle/>
-          <a:p>
-            <a:pPr>
-              <a:defRPr sz="819" b="1">
+            <a:off x="731520" y="1591056"/>
+            <a:ext cx="1645920" cy="384048"/>
+          </a:xfrm>
+          <a:prstGeom prst="rect">
+            <a:avLst/>
+          </a:prstGeom>
+          <a:noFill/>
+        </p:spPr>
+        <p:txBody>
+          <a:bodyPr wrap="square" lIns="27432" rIns="27432" tIns="9144">
+            <a:spAutoFit/>
+          </a:bodyPr>
+          <a:lstStyle/>
+          <a:p>
+            <a:pPr>
+              <a:defRPr sz="2000" b="1">
+                <a:solidFill>
+                  <a:srgbClr val="161C27"/>
+                </a:solidFill>
+              </a:defRPr>
+            </a:pPr>
+            <a:r>
+              <a:t>Churn</a:t>
+            </a:r>
+          </a:p>
+        </p:txBody>
+      </p:sp>
+      <p:sp>
+        <p:nvSpPr>
+          <p:cNvPr id="11" name="TextBox 10"/>
+          <p:cNvSpPr txBox="1"/>
+          <p:nvPr/>
+        </p:nvSpPr>
+        <p:spPr>
+          <a:xfrm>
+            <a:off x="731520" y="1993392"/>
+            <a:ext cx="1645920" cy="45719"/>
+          </a:xfrm>
+          <a:prstGeom prst="rect">
+            <a:avLst/>
+          </a:prstGeom>
+          <a:noFill/>
+        </p:spPr>
+        <p:txBody>
+          <a:bodyPr wrap="square" lIns="27432" rIns="27432" tIns="9144">
+            <a:spAutoFit/>
+          </a:bodyPr>
+          <a:lstStyle/>
+          <a:p>
+            <a:pPr>
+              <a:defRPr sz="919" b="0">
                 <a:solidFill>
                   <a:srgbClr val="5E6877"/>
                 </a:solidFill>
               </a:defRPr>
             </a:pPr>
             <a:r>
-              <a:t>SALIDA</a:t>
-            </a:r>
-          </a:p>
-        </p:txBody>
-      </p:sp>
-      <p:sp>
-        <p:nvSpPr>
-          <p:cNvPr id="11" name="TextBox 10"/>
-          <p:cNvSpPr txBox="1"/>
-          <p:nvPr/>
-        </p:nvSpPr>
-        <p:spPr>
-          <a:xfrm>
-            <a:off x="5943600" y="1709928"/>
-            <a:ext cx="2103120" cy="384048"/>
-          </a:xfrm>
-          <a:prstGeom prst="rect">
-            <a:avLst/>
-          </a:prstGeom>
-          <a:noFill/>
-        </p:spPr>
-        <p:txBody>
-          <a:bodyPr wrap="square" lIns="27432" rIns="27432" tIns="9144">
-            <a:spAutoFit/>
-          </a:bodyPr>
-          <a:lstStyle/>
-          <a:p>
-            <a:pPr>
-              <a:defRPr sz="2000" b="1">
-                <a:solidFill>
-                  <a:srgbClr val="161C27"/>
-                </a:solidFill>
-              </a:defRPr>
-            </a:pPr>
-            <a:r>
-              <a:t>score</a:t>
-            </a:r>
-          </a:p>
-        </p:txBody>
-      </p:sp>
-      <p:sp>
-        <p:nvSpPr>
-          <p:cNvPr id="12" name="TextBox 11"/>
-          <p:cNvSpPr txBox="1"/>
-          <p:nvPr/>
-        </p:nvSpPr>
-        <p:spPr>
-          <a:xfrm>
-            <a:off x="5943600" y="2112264"/>
-            <a:ext cx="2103120" cy="45719"/>
-          </a:xfrm>
-          <a:prstGeom prst="rect">
-            <a:avLst/>
-          </a:prstGeom>
-          <a:noFill/>
-        </p:spPr>
-        <p:txBody>
-          <a:bodyPr wrap="square" lIns="27432" rIns="27432" tIns="9144">
-            <a:spAutoFit/>
-          </a:bodyPr>
-          <a:lstStyle/>
-          <a:p>
-            <a:pPr>
-              <a:defRPr sz="919" b="0">
-                <a:solidFill>
-                  <a:srgbClr val="5E6877"/>
-                </a:solidFill>
-              </a:defRPr>
-            </a:pPr>
-            <a:r>
-              <a:t>probabilidad de churn</a:t>
-            </a:r>
-          </a:p>
-        </p:txBody>
-      </p:sp>
-      <p:sp>
-        <p:nvSpPr>
-          <p:cNvPr id="13" name="Rectangle 12"/>
+              <a:t>Yes si el cliente se dio de baja</a:t>
+            </a:r>
+          </a:p>
+        </p:txBody>
+      </p:sp>
+      <p:sp>
+        <p:nvSpPr>
+          <p:cNvPr id="12" name="Rectangle 11"/>
           <p:cNvSpPr/>
           <p:nvPr/>
         </p:nvSpPr>
         <p:spPr>
           <a:xfrm>
-            <a:off x="5806440" y="2423160"/>
-            <a:ext cx="2377440" cy="868680"/>
+            <a:off x="2743200" y="1207008"/>
+            <a:ext cx="1920240" cy="868680"/>
           </a:xfrm>
           <a:prstGeom prst="rect">
             <a:avLst/>
@@ -6600,20 +6299,20 @@
       </p:sp>
       <p:sp>
         <p:nvSpPr>
-          <p:cNvPr id="14" name="Rectangle 13"/>
+          <p:cNvPr id="13" name="Rectangle 12"/>
           <p:cNvSpPr/>
           <p:nvPr/>
         </p:nvSpPr>
         <p:spPr>
           <a:xfrm>
-            <a:off x="5806440" y="2423160"/>
-            <a:ext cx="2377440" cy="73152"/>
+            <a:off x="2743200" y="1207008"/>
+            <a:ext cx="1920240" cy="73152"/>
           </a:xfrm>
           <a:prstGeom prst="rect">
             <a:avLst/>
           </a:prstGeom>
           <a:solidFill>
-            <a:srgbClr val="3C9A60"/>
+            <a:srgbClr val="229799"/>
           </a:solidFill>
           <a:ln>
             <a:noFill/>
@@ -6643,119 +6342,119 @@
       </p:sp>
       <p:sp>
         <p:nvSpPr>
+          <p:cNvPr id="14" name="TextBox 13"/>
+          <p:cNvSpPr txBox="1"/>
+          <p:nvPr/>
+        </p:nvSpPr>
+        <p:spPr>
+          <a:xfrm>
+            <a:off x="2880360" y="1353312"/>
+            <a:ext cx="1645920" cy="201168"/>
+          </a:xfrm>
+          <a:prstGeom prst="rect">
+            <a:avLst/>
+          </a:prstGeom>
+          <a:noFill/>
+        </p:spPr>
+        <p:txBody>
+          <a:bodyPr wrap="square" lIns="27432" rIns="27432" tIns="9144">
+            <a:spAutoFit/>
+          </a:bodyPr>
+          <a:lstStyle/>
+          <a:p>
+            <a:pPr>
+              <a:defRPr sz="819" b="1">
+                <a:solidFill>
+                  <a:srgbClr val="5E6877"/>
+                </a:solidFill>
+              </a:defRPr>
+            </a:pPr>
+            <a:r>
+              <a:t>BASE</a:t>
+            </a:r>
+          </a:p>
+        </p:txBody>
+      </p:sp>
+      <p:sp>
+        <p:nvSpPr>
           <p:cNvPr id="15" name="TextBox 14"/>
           <p:cNvSpPr txBox="1"/>
           <p:nvPr/>
         </p:nvSpPr>
         <p:spPr>
           <a:xfrm>
-            <a:off x="5943600" y="2569464"/>
-            <a:ext cx="2103120" cy="201168"/>
-          </a:xfrm>
-          <a:prstGeom prst="rect">
-            <a:avLst/>
-          </a:prstGeom>
-          <a:noFill/>
-        </p:spPr>
-        <p:txBody>
-          <a:bodyPr wrap="square" lIns="27432" rIns="27432" tIns="9144">
-            <a:spAutoFit/>
-          </a:bodyPr>
-          <a:lstStyle/>
-          <a:p>
-            <a:pPr>
-              <a:defRPr sz="819" b="1">
+            <a:off x="2880360" y="1591056"/>
+            <a:ext cx="1645920" cy="384048"/>
+          </a:xfrm>
+          <a:prstGeom prst="rect">
+            <a:avLst/>
+          </a:prstGeom>
+          <a:noFill/>
+        </p:spPr>
+        <p:txBody>
+          <a:bodyPr wrap="square" lIns="27432" rIns="27432" tIns="9144">
+            <a:spAutoFit/>
+          </a:bodyPr>
+          <a:lstStyle/>
+          <a:p>
+            <a:pPr>
+              <a:defRPr sz="2000" b="1">
+                <a:solidFill>
+                  <a:srgbClr val="161C27"/>
+                </a:solidFill>
+              </a:defRPr>
+            </a:pPr>
+            <a:r>
+              <a:t>7.043</a:t>
+            </a:r>
+          </a:p>
+        </p:txBody>
+      </p:sp>
+      <p:sp>
+        <p:nvSpPr>
+          <p:cNvPr id="16" name="TextBox 15"/>
+          <p:cNvSpPr txBox="1"/>
+          <p:nvPr/>
+        </p:nvSpPr>
+        <p:spPr>
+          <a:xfrm>
+            <a:off x="2880360" y="1993392"/>
+            <a:ext cx="1645920" cy="45719"/>
+          </a:xfrm>
+          <a:prstGeom prst="rect">
+            <a:avLst/>
+          </a:prstGeom>
+          <a:noFill/>
+        </p:spPr>
+        <p:txBody>
+          <a:bodyPr wrap="square" lIns="27432" rIns="27432" tIns="9144">
+            <a:spAutoFit/>
+          </a:bodyPr>
+          <a:lstStyle/>
+          <a:p>
+            <a:pPr>
+              <a:defRPr sz="919" b="0">
                 <a:solidFill>
                   <a:srgbClr val="5E6877"/>
                 </a:solidFill>
               </a:defRPr>
             </a:pPr>
             <a:r>
-              <a:t>USO</a:t>
-            </a:r>
-          </a:p>
-        </p:txBody>
-      </p:sp>
-      <p:sp>
-        <p:nvSpPr>
-          <p:cNvPr id="16" name="TextBox 15"/>
-          <p:cNvSpPr txBox="1"/>
-          <p:nvPr/>
-        </p:nvSpPr>
-        <p:spPr>
-          <a:xfrm>
-            <a:off x="5943600" y="2807208"/>
-            <a:ext cx="2103120" cy="384048"/>
-          </a:xfrm>
-          <a:prstGeom prst="rect">
-            <a:avLst/>
-          </a:prstGeom>
-          <a:noFill/>
-        </p:spPr>
-        <p:txBody>
-          <a:bodyPr wrap="square" lIns="27432" rIns="27432" tIns="9144">
-            <a:spAutoFit/>
-          </a:bodyPr>
-          <a:lstStyle/>
-          <a:p>
-            <a:pPr>
-              <a:defRPr sz="2000" b="1">
-                <a:solidFill>
-                  <a:srgbClr val="161C27"/>
-                </a:solidFill>
-              </a:defRPr>
-            </a:pPr>
-            <a:r>
-              <a:t>ranking</a:t>
-            </a:r>
-          </a:p>
-        </p:txBody>
-      </p:sp>
-      <p:sp>
-        <p:nvSpPr>
-          <p:cNvPr id="17" name="TextBox 16"/>
-          <p:cNvSpPr txBox="1"/>
-          <p:nvPr/>
-        </p:nvSpPr>
-        <p:spPr>
-          <a:xfrm>
-            <a:off x="5943600" y="3209544"/>
-            <a:ext cx="2103120" cy="45719"/>
-          </a:xfrm>
-          <a:prstGeom prst="rect">
-            <a:avLst/>
-          </a:prstGeom>
-          <a:noFill/>
-        </p:spPr>
-        <p:txBody>
-          <a:bodyPr wrap="square" lIns="27432" rIns="27432" tIns="9144">
-            <a:spAutoFit/>
-          </a:bodyPr>
-          <a:lstStyle/>
-          <a:p>
-            <a:pPr>
-              <a:defRPr sz="919" b="0">
-                <a:solidFill>
-                  <a:srgbClr val="5E6877"/>
-                </a:solidFill>
-              </a:defRPr>
-            </a:pPr>
-            <a:r>
-              <a:t>agenda de retencion</a:t>
-            </a:r>
-          </a:p>
-        </p:txBody>
-      </p:sp>
-      <p:sp>
-        <p:nvSpPr>
-          <p:cNvPr id="18" name="Rectangle 17"/>
+              <a:t>1869 churners vs 5174 no churn</a:t>
+            </a:r>
+          </a:p>
+        </p:txBody>
+      </p:sp>
+      <p:sp>
+        <p:nvSpPr>
+          <p:cNvPr id="17" name="Rectangle 16"/>
           <p:cNvSpPr/>
           <p:nvPr/>
         </p:nvSpPr>
         <p:spPr>
           <a:xfrm>
-            <a:off x="5806440" y="3520440"/>
-            <a:ext cx="2377440" cy="868680"/>
+            <a:off x="4892040" y="1207008"/>
+            <a:ext cx="1508760" cy="868680"/>
           </a:xfrm>
           <a:prstGeom prst="rect">
             <a:avLst/>
@@ -6793,14 +6492,14 @@
       </p:sp>
       <p:sp>
         <p:nvSpPr>
-          <p:cNvPr id="19" name="Rectangle 18"/>
+          <p:cNvPr id="18" name="Rectangle 17"/>
           <p:cNvSpPr/>
           <p:nvPr/>
         </p:nvSpPr>
         <p:spPr>
           <a:xfrm>
-            <a:off x="5806440" y="3520440"/>
-            <a:ext cx="2377440" cy="73152"/>
+            <a:off x="4892040" y="1207008"/>
+            <a:ext cx="1508760" cy="73152"/>
           </a:xfrm>
           <a:prstGeom prst="rect">
             <a:avLst/>
@@ -6836,14 +6535,207 @@
       </p:sp>
       <p:sp>
         <p:nvSpPr>
+          <p:cNvPr id="19" name="TextBox 18"/>
+          <p:cNvSpPr txBox="1"/>
+          <p:nvPr/>
+        </p:nvSpPr>
+        <p:spPr>
+          <a:xfrm>
+            <a:off x="5029200" y="1353312"/>
+            <a:ext cx="1234439" cy="201168"/>
+          </a:xfrm>
+          <a:prstGeom prst="rect">
+            <a:avLst/>
+          </a:prstGeom>
+          <a:noFill/>
+        </p:spPr>
+        <p:txBody>
+          <a:bodyPr wrap="square" lIns="27432" rIns="27432" tIns="9144">
+            <a:spAutoFit/>
+          </a:bodyPr>
+          <a:lstStyle/>
+          <a:p>
+            <a:pPr>
+              <a:defRPr sz="819" b="1">
+                <a:solidFill>
+                  <a:srgbClr val="5E6877"/>
+                </a:solidFill>
+              </a:defRPr>
+            </a:pPr>
+            <a:r>
+              <a:t>TASA</a:t>
+            </a:r>
+          </a:p>
+        </p:txBody>
+      </p:sp>
+      <p:sp>
+        <p:nvSpPr>
           <p:cNvPr id="20" name="TextBox 19"/>
           <p:cNvSpPr txBox="1"/>
           <p:nvPr/>
         </p:nvSpPr>
         <p:spPr>
           <a:xfrm>
-            <a:off x="5943600" y="3666744"/>
-            <a:ext cx="2103120" cy="201168"/>
+            <a:off x="5029200" y="1591056"/>
+            <a:ext cx="1234439" cy="384048"/>
+          </a:xfrm>
+          <a:prstGeom prst="rect">
+            <a:avLst/>
+          </a:prstGeom>
+          <a:noFill/>
+        </p:spPr>
+        <p:txBody>
+          <a:bodyPr wrap="square" lIns="27432" rIns="27432" tIns="9144">
+            <a:spAutoFit/>
+          </a:bodyPr>
+          <a:lstStyle/>
+          <a:p>
+            <a:pPr>
+              <a:defRPr sz="2000" b="1">
+                <a:solidFill>
+                  <a:srgbClr val="161C27"/>
+                </a:solidFill>
+              </a:defRPr>
+            </a:pPr>
+            <a:r>
+              <a:t>26.5%</a:t>
+            </a:r>
+          </a:p>
+        </p:txBody>
+      </p:sp>
+      <p:sp>
+        <p:nvSpPr>
+          <p:cNvPr id="21" name="TextBox 20"/>
+          <p:cNvSpPr txBox="1"/>
+          <p:nvPr/>
+        </p:nvSpPr>
+        <p:spPr>
+          <a:xfrm>
+            <a:off x="5029200" y="1993392"/>
+            <a:ext cx="1234439" cy="45719"/>
+          </a:xfrm>
+          <a:prstGeom prst="rect">
+            <a:avLst/>
+          </a:prstGeom>
+          <a:noFill/>
+        </p:spPr>
+        <p:txBody>
+          <a:bodyPr wrap="square" lIns="27432" rIns="27432" tIns="9144">
+            <a:spAutoFit/>
+          </a:bodyPr>
+          <a:lstStyle/>
+          <a:p>
+            <a:pPr>
+              <a:defRPr sz="919" b="0">
+                <a:solidFill>
+                  <a:srgbClr val="5E6877"/>
+                </a:solidFill>
+              </a:defRPr>
+            </a:pPr>
+            <a:r>
+              <a:t>clase positiva minoritaria</a:t>
+            </a:r>
+          </a:p>
+        </p:txBody>
+      </p:sp>
+      <p:sp>
+        <p:nvSpPr>
+          <p:cNvPr id="22" name="Rectangle 21"/>
+          <p:cNvSpPr/>
+          <p:nvPr/>
+        </p:nvSpPr>
+        <p:spPr>
+          <a:xfrm>
+            <a:off x="6629400" y="1207008"/>
+            <a:ext cx="1828800" cy="868680"/>
+          </a:xfrm>
+          <a:prstGeom prst="rect">
+            <a:avLst/>
+          </a:prstGeom>
+          <a:solidFill>
+            <a:srgbClr val="FFFFFF"/>
+          </a:solidFill>
+          <a:ln>
+            <a:solidFill>
+              <a:srgbClr val="DCE2EB"/>
+            </a:solidFill>
+          </a:ln>
+        </p:spPr>
+        <p:style>
+          <a:lnRef idx="1">
+            <a:schemeClr val="accent1"/>
+          </a:lnRef>
+          <a:fillRef idx="3">
+            <a:schemeClr val="accent1"/>
+          </a:fillRef>
+          <a:effectRef idx="2">
+            <a:schemeClr val="accent1"/>
+          </a:effectRef>
+          <a:fontRef idx="minor">
+            <a:schemeClr val="lt1"/>
+          </a:fontRef>
+        </p:style>
+        <p:txBody>
+          <a:bodyPr rtlCol="0" anchor="ctr"/>
+          <a:lstStyle/>
+          <a:p>
+            <a:pPr algn="ctr"/>
+          </a:p>
+        </p:txBody>
+      </p:sp>
+      <p:sp>
+        <p:nvSpPr>
+          <p:cNvPr id="23" name="Rectangle 22"/>
+          <p:cNvSpPr/>
+          <p:nvPr/>
+        </p:nvSpPr>
+        <p:spPr>
+          <a:xfrm>
+            <a:off x="6629400" y="1207008"/>
+            <a:ext cx="1828800" cy="73152"/>
+          </a:xfrm>
+          <a:prstGeom prst="rect">
+            <a:avLst/>
+          </a:prstGeom>
+          <a:solidFill>
+            <a:srgbClr val="2356C2"/>
+          </a:solidFill>
+          <a:ln>
+            <a:noFill/>
+          </a:ln>
+        </p:spPr>
+        <p:style>
+          <a:lnRef idx="1">
+            <a:schemeClr val="accent1"/>
+          </a:lnRef>
+          <a:fillRef idx="3">
+            <a:schemeClr val="accent1"/>
+          </a:fillRef>
+          <a:effectRef idx="2">
+            <a:schemeClr val="accent1"/>
+          </a:effectRef>
+          <a:fontRef idx="minor">
+            <a:schemeClr val="lt1"/>
+          </a:fontRef>
+        </p:style>
+        <p:txBody>
+          <a:bodyPr rtlCol="0" anchor="ctr"/>
+          <a:lstStyle/>
+          <a:p>
+            <a:pPr algn="ctr"/>
+          </a:p>
+        </p:txBody>
+      </p:sp>
+      <p:sp>
+        <p:nvSpPr>
+          <p:cNvPr id="24" name="TextBox 23"/>
+          <p:cNvSpPr txBox="1"/>
+          <p:nvPr/>
+        </p:nvSpPr>
+        <p:spPr>
+          <a:xfrm>
+            <a:off x="6766560" y="1353312"/>
+            <a:ext cx="1554480" cy="201168"/>
           </a:xfrm>
           <a:prstGeom prst="rect">
             <a:avLst/>
@@ -6864,21 +6756,21 @@
               </a:defRPr>
             </a:pPr>
             <a:r>
-              <a:t>RIESGO</a:t>
-            </a:r>
-          </a:p>
-        </p:txBody>
-      </p:sp>
-      <p:sp>
-        <p:nvSpPr>
-          <p:cNvPr id="21" name="TextBox 20"/>
-          <p:cNvSpPr txBox="1"/>
-          <p:nvPr/>
-        </p:nvSpPr>
-        <p:spPr>
-          <a:xfrm>
-            <a:off x="5943600" y="3904488"/>
-            <a:ext cx="2103120" cy="384048"/>
+              <a:t>OBJETIVO</a:t>
+            </a:r>
+          </a:p>
+        </p:txBody>
+      </p:sp>
+      <p:sp>
+        <p:nvSpPr>
+          <p:cNvPr id="25" name="TextBox 24"/>
+          <p:cNvSpPr txBox="1"/>
+          <p:nvPr/>
+        </p:nvSpPr>
+        <p:spPr>
+          <a:xfrm>
+            <a:off x="6766560" y="1591056"/>
+            <a:ext cx="1554480" cy="384048"/>
           </a:xfrm>
           <a:prstGeom prst="rect">
             <a:avLst/>
@@ -6899,21 +6791,21 @@
               </a:defRPr>
             </a:pPr>
             <a:r>
-              <a:t>falsos +</a:t>
-            </a:r>
-          </a:p>
-        </p:txBody>
-      </p:sp>
-      <p:sp>
-        <p:nvSpPr>
-          <p:cNvPr id="22" name="TextBox 21"/>
-          <p:cNvSpPr txBox="1"/>
-          <p:nvPr/>
-        </p:nvSpPr>
-        <p:spPr>
-          <a:xfrm>
-            <a:off x="5943600" y="4306824"/>
-            <a:ext cx="2103120" cy="45719"/>
+              <a:t>score</a:t>
+            </a:r>
+          </a:p>
+        </p:txBody>
+      </p:sp>
+      <p:sp>
+        <p:nvSpPr>
+          <p:cNvPr id="26" name="TextBox 25"/>
+          <p:cNvSpPr txBox="1"/>
+          <p:nvPr/>
+        </p:nvSpPr>
+        <p:spPr>
+          <a:xfrm>
+            <a:off x="6766560" y="1993392"/>
+            <a:ext cx="1554480" cy="45719"/>
           </a:xfrm>
           <a:prstGeom prst="rect">
             <a:avLst/>
@@ -6934,7 +6826,125 @@
               </a:defRPr>
             </a:pPr>
             <a:r>
-              <a:t>costo comercial</a:t>
+              <a:t>probabilidad de churn por cliente</a:t>
+            </a:r>
+          </a:p>
+        </p:txBody>
+      </p:sp>
+      <p:sp>
+        <p:nvSpPr>
+          <p:cNvPr id="27" name="TextBox 26"/>
+          <p:cNvSpPr txBox="1"/>
+          <p:nvPr/>
+        </p:nvSpPr>
+        <p:spPr>
+          <a:xfrm>
+            <a:off x="713232" y="2514600"/>
+            <a:ext cx="7772400" cy="1417320"/>
+          </a:xfrm>
+          <a:prstGeom prst="rect">
+            <a:avLst/>
+          </a:prstGeom>
+          <a:noFill/>
+        </p:spPr>
+        <p:txBody>
+          <a:bodyPr wrap="square">
+            <a:spAutoFit/>
+          </a:bodyPr>
+          <a:lstStyle/>
+          <a:p>
+            <a:pPr>
+              <a:spcAft>
+                <a:spcPts val="500"/>
+              </a:spcAft>
+              <a:defRPr sz="1220">
+                <a:solidFill>
+                  <a:srgbClr val="161C27"/>
+                </a:solidFill>
+              </a:defRPr>
+            </a:pPr>
+            <a:r>
+              <a:t>Problema: una telco pierde ingreso recurrente cuando un cliente abandona el servicio.</a:t>
+            </a:r>
+          </a:p>
+          <a:p>
+            <a:pPr>
+              <a:spcAft>
+                <a:spcPts val="500"/>
+              </a:spcAft>
+              <a:defRPr sz="1220">
+                <a:solidFill>
+                  <a:srgbClr val="161C27"/>
+                </a:solidFill>
+              </a:defRPr>
+            </a:pPr>
+            <a:r>
+              <a:t>Decision de negocio: ordenar clientes activos por riesgo y priorizar acciones de retencion.</a:t>
+            </a:r>
+          </a:p>
+          <a:p>
+            <a:pPr>
+              <a:spcAft>
+                <a:spcPts val="500"/>
+              </a:spcAft>
+              <a:defRPr sz="1220">
+                <a:solidFill>
+                  <a:srgbClr val="161C27"/>
+                </a:solidFill>
+              </a:defRPr>
+            </a:pPr>
+            <a:r>
+              <a:t>Regla economica: adquirir un cliente nuevo suele costar 5 a 25 veces mas que retener uno existente (HBR/Bain).</a:t>
+            </a:r>
+          </a:p>
+          <a:p>
+            <a:pPr>
+              <a:spcAft>
+                <a:spcPts val="500"/>
+              </a:spcAft>
+              <a:defRPr sz="1220">
+                <a:solidFill>
+                  <a:srgbClr val="161C27"/>
+                </a:solidFill>
+              </a:defRPr>
+            </a:pPr>
+            <a:r>
+              <a:t>Impacto esperado: incluso mejoras chicas de retencion pueden tener efecto grande en rentabilidad; el modelo ayuda a enfocar el esfuerzo comercial.</a:t>
+            </a:r>
+          </a:p>
+        </p:txBody>
+      </p:sp>
+      <p:sp>
+        <p:nvSpPr>
+          <p:cNvPr id="28" name="TextBox 27"/>
+          <p:cNvSpPr txBox="1"/>
+          <p:nvPr/>
+        </p:nvSpPr>
+        <p:spPr>
+          <a:xfrm>
+            <a:off x="777240" y="4343400"/>
+            <a:ext cx="7498079" cy="256032"/>
+          </a:xfrm>
+          <a:prstGeom prst="rect">
+            <a:avLst/>
+          </a:prstGeom>
+          <a:noFill/>
+        </p:spPr>
+        <p:txBody>
+          <a:bodyPr wrap="square" lIns="27432" rIns="27432" tIns="9144">
+            <a:spAutoFit/>
+          </a:bodyPr>
+          <a:lstStyle/>
+          <a:p>
+            <a:pPr>
+              <a:defRPr sz="950" b="0">
+                <a:solidFill>
+                  <a:srgbClr val="5E6877"/>
+                </a:solidFill>
+              </a:defRPr>
+            </a:pPr>
+            <a:r>
+              <a:t>Nota: el modelo no decide la oferta; entrega un ranking para que negocio defina accion, costo y capacidad.</a:t>
             </a:r>
           </a:p>
         </p:txBody>
@@ -7073,7 +7083,7 @@
               </a:defRPr>
             </a:pPr>
             <a:r>
-              <a:t>2 · DATASET</a:t>
+              <a:t>2 - DATASET</a:t>
             </a:r>
           </a:p>
         </p:txBody>
@@ -7108,7 +7118,7 @@
               </a:defRPr>
             </a:pPr>
             <a:r>
-              <a:t>7.043 clientes, 21 variables y una clase positiva minoritaria</a:t>
+              <a:t>Variables predictoras agrupadas y limpieza realizada</a:t>
             </a:r>
           </a:p>
         </p:txBody>
@@ -7156,8 +7166,8 @@
         </p:nvSpPr>
         <p:spPr>
           <a:xfrm>
-            <a:off x="594360" y="1234440"/>
-            <a:ext cx="1645920" cy="914400"/>
+            <a:off x="502920" y="1143000"/>
+            <a:ext cx="1417320" cy="749808"/>
           </a:xfrm>
           <a:prstGeom prst="rect">
             <a:avLst/>
@@ -7201,14 +7211,14 @@
         </p:nvSpPr>
         <p:spPr>
           <a:xfrm>
-            <a:off x="594360" y="1234440"/>
-            <a:ext cx="1645920" cy="73152"/>
+            <a:off x="502920" y="1143000"/>
+            <a:ext cx="1417320" cy="73152"/>
           </a:xfrm>
           <a:prstGeom prst="rect">
             <a:avLst/>
           </a:prstGeom>
           <a:solidFill>
-            <a:srgbClr val="E77E37"/>
+            <a:srgbClr val="2356C2"/>
           </a:solidFill>
           <a:ln>
             <a:noFill/>
@@ -7244,8 +7254,8 @@
         </p:nvSpPr>
         <p:spPr>
           <a:xfrm>
-            <a:off x="731520" y="1380744"/>
-            <a:ext cx="1371600" cy="201168"/>
+            <a:off x="640080" y="1289304"/>
+            <a:ext cx="1143000" cy="201168"/>
           </a:xfrm>
           <a:prstGeom prst="rect">
             <a:avLst/>
@@ -7266,7 +7276,7 @@
               </a:defRPr>
             </a:pPr>
             <a:r>
-              <a:t>TARGET</a:t>
+              <a:t>TOTAL</a:t>
             </a:r>
           </a:p>
         </p:txBody>
@@ -7279,8 +7289,8 @@
         </p:nvSpPr>
         <p:spPr>
           <a:xfrm>
-            <a:off x="731520" y="1618488"/>
-            <a:ext cx="1371600" cy="384048"/>
+            <a:off x="640080" y="1527048"/>
+            <a:ext cx="1143000" cy="384048"/>
           </a:xfrm>
           <a:prstGeom prst="rect">
             <a:avLst/>
@@ -7301,7 +7311,7 @@
               </a:defRPr>
             </a:pPr>
             <a:r>
-              <a:t>Churn</a:t>
+              <a:t>21</a:t>
             </a:r>
           </a:p>
         </p:txBody>
@@ -7314,8 +7324,8 @@
         </p:nvSpPr>
         <p:spPr>
           <a:xfrm>
-            <a:off x="731520" y="2020824"/>
-            <a:ext cx="1371600" cy="91439"/>
+            <a:off x="640080" y="1929384"/>
+            <a:ext cx="1143000" cy="-73152"/>
           </a:xfrm>
           <a:prstGeom prst="rect">
             <a:avLst/>
@@ -7336,7 +7346,7 @@
               </a:defRPr>
             </a:pPr>
             <a:r>
-              <a:t>Yes / No</a:t>
+              <a:t>columnas originales</a:t>
             </a:r>
           </a:p>
         </p:txBody>
@@ -7349,8 +7359,8 @@
         </p:nvSpPr>
         <p:spPr>
           <a:xfrm>
-            <a:off x="2514600" y="1234440"/>
-            <a:ext cx="1645920" cy="914400"/>
+            <a:off x="2084831" y="1143000"/>
+            <a:ext cx="1600200" cy="749808"/>
           </a:xfrm>
           <a:prstGeom prst="rect">
             <a:avLst/>
@@ -7394,14 +7404,14 @@
         </p:nvSpPr>
         <p:spPr>
           <a:xfrm>
-            <a:off x="2514600" y="1234440"/>
-            <a:ext cx="1645920" cy="73152"/>
+            <a:off x="2084831" y="1143000"/>
+            <a:ext cx="1600200" cy="73152"/>
           </a:xfrm>
           <a:prstGeom prst="rect">
             <a:avLst/>
           </a:prstGeom>
           <a:solidFill>
-            <a:srgbClr val="C84752"/>
+            <a:srgbClr val="3C9A60"/>
           </a:solidFill>
           <a:ln>
             <a:noFill/>
@@ -7437,8 +7447,8 @@
         </p:nvSpPr>
         <p:spPr>
           <a:xfrm>
-            <a:off x="2651760" y="1380744"/>
-            <a:ext cx="1371600" cy="201168"/>
+            <a:off x="2221991" y="1289304"/>
+            <a:ext cx="1325880" cy="201168"/>
           </a:xfrm>
           <a:prstGeom prst="rect">
             <a:avLst/>
@@ -7459,7 +7469,7 @@
               </a:defRPr>
             </a:pPr>
             <a:r>
-              <a:t>POSITIVOS</a:t>
+              <a:t>PREDICTORAS</a:t>
             </a:r>
           </a:p>
         </p:txBody>
@@ -7472,8 +7482,8 @@
         </p:nvSpPr>
         <p:spPr>
           <a:xfrm>
-            <a:off x="2651760" y="1618488"/>
-            <a:ext cx="1371600" cy="384048"/>
+            <a:off x="2221991" y="1527048"/>
+            <a:ext cx="1325880" cy="384048"/>
           </a:xfrm>
           <a:prstGeom prst="rect">
             <a:avLst/>
@@ -7494,7 +7504,7 @@
               </a:defRPr>
             </a:pPr>
             <a:r>
-              <a:t>26.5%</a:t>
+              <a:t>19</a:t>
             </a:r>
           </a:p>
         </p:txBody>
@@ -7507,8 +7517,8 @@
         </p:nvSpPr>
         <p:spPr>
           <a:xfrm>
-            <a:off x="2651760" y="2020824"/>
-            <a:ext cx="1371600" cy="91439"/>
+            <a:off x="2221991" y="1929384"/>
+            <a:ext cx="1325880" cy="-73152"/>
           </a:xfrm>
           <a:prstGeom prst="rect">
             <a:avLst/>
@@ -7529,7 +7539,7 @@
               </a:defRPr>
             </a:pPr>
             <a:r>
-              <a:t>churn real</a:t>
+              <a:t>sin customerID ni Churn</a:t>
             </a:r>
           </a:p>
         </p:txBody>
@@ -7542,8 +7552,8 @@
         </p:nvSpPr>
         <p:spPr>
           <a:xfrm>
-            <a:off x="4434840" y="1234440"/>
-            <a:ext cx="1920240" cy="914400"/>
+            <a:off x="3867912" y="1143000"/>
+            <a:ext cx="1143000" cy="749808"/>
           </a:xfrm>
           <a:prstGeom prst="rect">
             <a:avLst/>
@@ -7587,14 +7597,14 @@
         </p:nvSpPr>
         <p:spPr>
           <a:xfrm>
-            <a:off x="4434840" y="1234440"/>
-            <a:ext cx="1920240" cy="73152"/>
+            <a:off x="3867912" y="1143000"/>
+            <a:ext cx="1143000" cy="73152"/>
           </a:xfrm>
           <a:prstGeom prst="rect">
             <a:avLst/>
           </a:prstGeom>
           <a:solidFill>
-            <a:srgbClr val="229799"/>
+            <a:srgbClr val="E77E37"/>
           </a:solidFill>
           <a:ln>
             <a:noFill/>
@@ -7630,8 +7640,8 @@
         </p:nvSpPr>
         <p:spPr>
           <a:xfrm>
-            <a:off x="4572000" y="1380744"/>
-            <a:ext cx="1645920" cy="201168"/>
+            <a:off x="4005072" y="1289304"/>
+            <a:ext cx="868680" cy="201168"/>
           </a:xfrm>
           <a:prstGeom prst="rect">
             <a:avLst/>
@@ -7652,7 +7662,7 @@
               </a:defRPr>
             </a:pPr>
             <a:r>
-              <a:t>LIMPIEZA</a:t>
+              <a:t>TARGET</a:t>
             </a:r>
           </a:p>
         </p:txBody>
@@ -7665,8 +7675,8 @@
         </p:nvSpPr>
         <p:spPr>
           <a:xfrm>
-            <a:off x="4572000" y="1618488"/>
-            <a:ext cx="1645920" cy="384048"/>
+            <a:off x="4005072" y="1527048"/>
+            <a:ext cx="868680" cy="384048"/>
           </a:xfrm>
           <a:prstGeom prst="rect">
             <a:avLst/>
@@ -7687,7 +7697,7 @@
               </a:defRPr>
             </a:pPr>
             <a:r>
-              <a:t>11</a:t>
+              <a:t>1</a:t>
             </a:r>
           </a:p>
         </p:txBody>
@@ -7700,8 +7710,8 @@
         </p:nvSpPr>
         <p:spPr>
           <a:xfrm>
-            <a:off x="4572000" y="2020824"/>
-            <a:ext cx="1645920" cy="91439"/>
+            <a:off x="4005072" y="1929384"/>
+            <a:ext cx="868680" cy="-73152"/>
           </a:xfrm>
           <a:prstGeom prst="rect">
             <a:avLst/>
@@ -7722,7 +7732,7 @@
               </a:defRPr>
             </a:pPr>
             <a:r>
-              <a:t>TotalCharges vacio, tenure=0</a:t>
+              <a:t>Churn</a:t>
             </a:r>
           </a:p>
         </p:txBody>
@@ -7735,8 +7745,8 @@
         </p:nvSpPr>
         <p:spPr>
           <a:xfrm>
-            <a:off x="6629400" y="1234440"/>
-            <a:ext cx="1828800" cy="914400"/>
+            <a:off x="5193792" y="1143000"/>
+            <a:ext cx="1325880" cy="749808"/>
           </a:xfrm>
           <a:prstGeom prst="rect">
             <a:avLst/>
@@ -7780,14 +7790,14 @@
         </p:nvSpPr>
         <p:spPr>
           <a:xfrm>
-            <a:off x="6629400" y="1234440"/>
-            <a:ext cx="1828800" cy="73152"/>
+            <a:off x="5193792" y="1143000"/>
+            <a:ext cx="1325880" cy="73152"/>
           </a:xfrm>
           <a:prstGeom prst="rect">
             <a:avLst/>
           </a:prstGeom>
           <a:solidFill>
-            <a:srgbClr val="2356C2"/>
+            <a:srgbClr val="C84752"/>
           </a:solidFill>
           <a:ln>
             <a:noFill/>
@@ -7823,8 +7833,8 @@
         </p:nvSpPr>
         <p:spPr>
           <a:xfrm>
-            <a:off x="6766560" y="1380744"/>
-            <a:ext cx="1554480" cy="201168"/>
+            <a:off x="5330952" y="1289304"/>
+            <a:ext cx="1051560" cy="201168"/>
           </a:xfrm>
           <a:prstGeom prst="rect">
             <a:avLst/>
@@ -7845,7 +7855,7 @@
               </a:defRPr>
             </a:pPr>
             <a:r>
-              <a:t>FEATURES</a:t>
+              <a:t>ID</a:t>
             </a:r>
           </a:p>
         </p:txBody>
@@ -7858,8 +7868,8 @@
         </p:nvSpPr>
         <p:spPr>
           <a:xfrm>
-            <a:off x="6766560" y="1618488"/>
-            <a:ext cx="1554480" cy="384048"/>
+            <a:off x="5330952" y="1527048"/>
+            <a:ext cx="1051560" cy="384048"/>
           </a:xfrm>
           <a:prstGeom prst="rect">
             <a:avLst/>
@@ -7880,7 +7890,7 @@
               </a:defRPr>
             </a:pPr>
             <a:r>
-              <a:t>originales + FE</a:t>
+              <a:t>1</a:t>
             </a:r>
           </a:p>
         </p:txBody>
@@ -7893,8 +7903,8 @@
         </p:nvSpPr>
         <p:spPr>
           <a:xfrm>
-            <a:off x="6766560" y="2020824"/>
-            <a:ext cx="1554480" cy="91439"/>
+            <a:off x="5330952" y="1929384"/>
+            <a:ext cx="1051560" cy="-73152"/>
           </a:xfrm>
           <a:prstGeom prst="rect">
             <a:avLst/>
@@ -7915,21 +7925,214 @@
               </a:defRPr>
             </a:pPr>
             <a:r>
-              <a:t>sin target encoding</a:t>
-            </a:r>
-          </a:p>
-        </p:txBody>
-      </p:sp>
-      <p:sp>
-        <p:nvSpPr>
-          <p:cNvPr id="27" name="TextBox 26"/>
-          <p:cNvSpPr txBox="1"/>
-          <p:nvPr/>
-        </p:nvSpPr>
-        <p:spPr>
-          <a:xfrm>
-            <a:off x="731520" y="2697480"/>
-            <a:ext cx="7772400" cy="1325880"/>
+              <a:t>excluido del modelo</a:t>
+            </a:r>
+          </a:p>
+        </p:txBody>
+      </p:sp>
+      <p:sp>
+        <p:nvSpPr>
+          <p:cNvPr id="27" name="Rectangle 26"/>
+          <p:cNvSpPr/>
+          <p:nvPr/>
+        </p:nvSpPr>
+        <p:spPr>
+          <a:xfrm>
+            <a:off x="6720840" y="1143000"/>
+            <a:ext cx="1737360" cy="749808"/>
+          </a:xfrm>
+          <a:prstGeom prst="rect">
+            <a:avLst/>
+          </a:prstGeom>
+          <a:solidFill>
+            <a:srgbClr val="FFFFFF"/>
+          </a:solidFill>
+          <a:ln>
+            <a:solidFill>
+              <a:srgbClr val="DCE2EB"/>
+            </a:solidFill>
+          </a:ln>
+        </p:spPr>
+        <p:style>
+          <a:lnRef idx="1">
+            <a:schemeClr val="accent1"/>
+          </a:lnRef>
+          <a:fillRef idx="3">
+            <a:schemeClr val="accent1"/>
+          </a:fillRef>
+          <a:effectRef idx="2">
+            <a:schemeClr val="accent1"/>
+          </a:effectRef>
+          <a:fontRef idx="minor">
+            <a:schemeClr val="lt1"/>
+          </a:fontRef>
+        </p:style>
+        <p:txBody>
+          <a:bodyPr rtlCol="0" anchor="ctr"/>
+          <a:lstStyle/>
+          <a:p>
+            <a:pPr algn="ctr"/>
+          </a:p>
+        </p:txBody>
+      </p:sp>
+      <p:sp>
+        <p:nvSpPr>
+          <p:cNvPr id="28" name="Rectangle 27"/>
+          <p:cNvSpPr/>
+          <p:nvPr/>
+        </p:nvSpPr>
+        <p:spPr>
+          <a:xfrm>
+            <a:off x="6720840" y="1143000"/>
+            <a:ext cx="1737360" cy="73152"/>
+          </a:xfrm>
+          <a:prstGeom prst="rect">
+            <a:avLst/>
+          </a:prstGeom>
+          <a:solidFill>
+            <a:srgbClr val="229799"/>
+          </a:solidFill>
+          <a:ln>
+            <a:noFill/>
+          </a:ln>
+        </p:spPr>
+        <p:style>
+          <a:lnRef idx="1">
+            <a:schemeClr val="accent1"/>
+          </a:lnRef>
+          <a:fillRef idx="3">
+            <a:schemeClr val="accent1"/>
+          </a:fillRef>
+          <a:effectRef idx="2">
+            <a:schemeClr val="accent1"/>
+          </a:effectRef>
+          <a:fontRef idx="minor">
+            <a:schemeClr val="lt1"/>
+          </a:fontRef>
+        </p:style>
+        <p:txBody>
+          <a:bodyPr rtlCol="0" anchor="ctr"/>
+          <a:lstStyle/>
+          <a:p>
+            <a:pPr algn="ctr"/>
+          </a:p>
+        </p:txBody>
+      </p:sp>
+      <p:sp>
+        <p:nvSpPr>
+          <p:cNvPr id="29" name="TextBox 28"/>
+          <p:cNvSpPr txBox="1"/>
+          <p:nvPr/>
+        </p:nvSpPr>
+        <p:spPr>
+          <a:xfrm>
+            <a:off x="6858000" y="1289304"/>
+            <a:ext cx="1463039" cy="201168"/>
+          </a:xfrm>
+          <a:prstGeom prst="rect">
+            <a:avLst/>
+          </a:prstGeom>
+          <a:noFill/>
+        </p:spPr>
+        <p:txBody>
+          <a:bodyPr wrap="square" lIns="27432" rIns="27432" tIns="9144">
+            <a:spAutoFit/>
+          </a:bodyPr>
+          <a:lstStyle/>
+          <a:p>
+            <a:pPr>
+              <a:defRPr sz="819" b="1">
+                <a:solidFill>
+                  <a:srgbClr val="5E6877"/>
+                </a:solidFill>
+              </a:defRPr>
+            </a:pPr>
+            <a:r>
+              <a:t>LIMPIEZA</a:t>
+            </a:r>
+          </a:p>
+        </p:txBody>
+      </p:sp>
+      <p:sp>
+        <p:nvSpPr>
+          <p:cNvPr id="30" name="TextBox 29"/>
+          <p:cNvSpPr txBox="1"/>
+          <p:nvPr/>
+        </p:nvSpPr>
+        <p:spPr>
+          <a:xfrm>
+            <a:off x="6858000" y="1527048"/>
+            <a:ext cx="1463039" cy="384048"/>
+          </a:xfrm>
+          <a:prstGeom prst="rect">
+            <a:avLst/>
+          </a:prstGeom>
+          <a:noFill/>
+        </p:spPr>
+        <p:txBody>
+          <a:bodyPr wrap="square" lIns="27432" rIns="27432" tIns="9144">
+            <a:spAutoFit/>
+          </a:bodyPr>
+          <a:lstStyle/>
+          <a:p>
+            <a:pPr>
+              <a:defRPr sz="2000" b="1">
+                <a:solidFill>
+                  <a:srgbClr val="161C27"/>
+                </a:solidFill>
+              </a:defRPr>
+            </a:pPr>
+            <a:r>
+              <a:t>11</a:t>
+            </a:r>
+          </a:p>
+        </p:txBody>
+      </p:sp>
+      <p:sp>
+        <p:nvSpPr>
+          <p:cNvPr id="31" name="TextBox 30"/>
+          <p:cNvSpPr txBox="1"/>
+          <p:nvPr/>
+        </p:nvSpPr>
+        <p:spPr>
+          <a:xfrm>
+            <a:off x="6858000" y="1929384"/>
+            <a:ext cx="1463039" cy="-73152"/>
+          </a:xfrm>
+          <a:prstGeom prst="rect">
+            <a:avLst/>
+          </a:prstGeom>
+          <a:noFill/>
+        </p:spPr>
+        <p:txBody>
+          <a:bodyPr wrap="square" lIns="27432" rIns="27432" tIns="9144">
+            <a:spAutoFit/>
+          </a:bodyPr>
+          <a:lstStyle/>
+          <a:p>
+            <a:pPr>
+              <a:defRPr sz="919" b="0">
+                <a:solidFill>
+                  <a:srgbClr val="5E6877"/>
+                </a:solidFill>
+              </a:defRPr>
+            </a:pPr>
+            <a:r>
+              <a:t>TotalCharges vacio</a:t>
+            </a:r>
+          </a:p>
+        </p:txBody>
+      </p:sp>
+      <p:sp>
+        <p:nvSpPr>
+          <p:cNvPr id="32" name="TextBox 31"/>
+          <p:cNvSpPr txBox="1"/>
+          <p:nvPr/>
+        </p:nvSpPr>
+        <p:spPr>
+          <a:xfrm>
+            <a:off x="685800" y="2240280"/>
+            <a:ext cx="7863840" cy="1737360"/>
           </a:xfrm>
           <a:prstGeom prst="rect">
             <a:avLst/>
@@ -7946,14 +8149,14 @@
               <a:spcAft>
                 <a:spcPts val="500"/>
               </a:spcAft>
-              <a:defRPr sz="1250">
+              <a:defRPr sz="1130">
                 <a:solidFill>
                   <a:srgbClr val="161C27"/>
                 </a:solidFill>
               </a:defRPr>
             </a:pPr>
             <a:r>
-              <a:t>Variables demograficas: genero, senior, pareja, dependientes.</a:t>
+              <a:t>Demograficas (4): genero, senior, pareja, dependientes. Senal baja/moderada; dependientes y pareja reducen churn observado.</a:t>
             </a:r>
           </a:p>
           <a:p>
@@ -7961,14 +8164,14 @@
               <a:spcAft>
                 <a:spcPts val="500"/>
               </a:spcAft>
-              <a:defRPr sz="1250">
+              <a:defRPr sz="1130">
                 <a:solidFill>
                   <a:srgbClr val="161C27"/>
                 </a:solidFill>
               </a:defRPr>
             </a:pPr>
             <a:r>
-              <a:t>Servicios: internet, seguridad, soporte, backup, streaming.</a:t>
+              <a:t>Servicios (9): telefono, internet, seguridad, backup, proteccion, soporte, streaming. Fibra y falta de soporte/seguridad elevan riesgo.</a:t>
             </a:r>
           </a:p>
           <a:p>
@@ -7976,14 +8179,14 @@
               <a:spcAft>
                 <a:spcPts val="500"/>
               </a:spcAft>
-              <a:defRPr sz="1250">
+              <a:defRPr sz="1130">
                 <a:solidFill>
                   <a:srgbClr val="161C27"/>
                 </a:solidFill>
               </a:defRPr>
             </a:pPr>
             <a:r>
-              <a:t>Contrato/facturacion: tenure, tipo de contrato, metodo de pago, cargos.</a:t>
+              <a:t>Contrato (2): tenure y tipo de contrato. Contrato mensual y baja antiguedad son los drivers mas fuertes.</a:t>
             </a:r>
           </a:p>
           <a:p>
@@ -7991,14 +8194,49 @@
               <a:spcAft>
                 <a:spcPts val="500"/>
               </a:spcAft>
-              <a:defRPr sz="1250">
+              <a:defRPr sz="1130">
                 <a:solidFill>
                   <a:srgbClr val="161C27"/>
                 </a:solidFill>
               </a:defRPr>
             </a:pPr>
             <a:r>
-              <a:t>Limitacion estructural: no hay fecha de corte ni historial temporal.</a:t>
+              <a:t>Facturacion (4): paperless, metodo de pago, MonthlyCharges, TotalCharges. Pago electronico y ciertos niveles de cargo aportan senal.</a:t>
+            </a:r>
+          </a:p>
+        </p:txBody>
+      </p:sp>
+      <p:sp>
+        <p:nvSpPr>
+          <p:cNvPr id="33" name="TextBox 32"/>
+          <p:cNvSpPr txBox="1"/>
+          <p:nvPr/>
+        </p:nvSpPr>
+        <p:spPr>
+          <a:xfrm>
+            <a:off x="713232" y="4315968"/>
+            <a:ext cx="7772400" cy="320040"/>
+          </a:xfrm>
+          <a:prstGeom prst="rect">
+            <a:avLst/>
+          </a:prstGeom>
+          <a:noFill/>
+        </p:spPr>
+        <p:txBody>
+          <a:bodyPr wrap="square" lIns="27432" rIns="27432" tIns="9144">
+            <a:spAutoFit/>
+          </a:bodyPr>
+          <a:lstStyle/>
+          <a:p>
+            <a:pPr>
+              <a:defRPr sz="950" b="0">
+                <a:solidFill>
+                  <a:srgbClr val="5E6877"/>
+                </a:solidFill>
+              </a:defRPr>
+            </a:pPr>
+            <a:r>
+              <a:t>Limpieza: TotalCharges venia como texto; los 11 vacios correspondian a clientes nuevos con tenure = 0 y se imputaron como 0. Se agregaron features derivadas reproducibles.</a:t>
             </a:r>
           </a:p>
         </p:txBody>
@@ -8137,7 +8375,7 @@
               </a:defRPr>
             </a:pPr>
             <a:r>
-              <a:t>3 · EDA</a:t>
+              <a:t>3 - EDA</a:t>
             </a:r>
           </a:p>
         </p:txBody>
@@ -8172,7 +8410,7 @@
               </a:defRPr>
             </a:pPr>
             <a:r>
-              <a:t>La tasa de churn cambia mucho segun contrato, servicio y soporte</a:t>
+              <a:t>La tasa de churn varia fuerte por categoria</a:t>
             </a:r>
           </a:p>
         </p:txBody>
@@ -8228,14 +8466,49 @@
         </p:blipFill>
         <p:spPr>
           <a:xfrm>
-            <a:off x="502920" y="1143000"/>
-            <a:ext cx="8183879" cy="4419865"/>
+            <a:off x="502920" y="1078992"/>
+            <a:ext cx="8138160" cy="4420729"/>
           </a:xfrm>
           <a:prstGeom prst="rect">
             <a:avLst/>
           </a:prstGeom>
         </p:spPr>
       </p:pic>
+      <p:sp>
+        <p:nvSpPr>
+          <p:cNvPr id="8" name="TextBox 7"/>
+          <p:cNvSpPr txBox="1"/>
+          <p:nvPr/>
+        </p:nvSpPr>
+        <p:spPr>
+          <a:xfrm>
+            <a:off x="685800" y="4462272"/>
+            <a:ext cx="7726679" cy="274320"/>
+          </a:xfrm>
+          <a:prstGeom prst="rect">
+            <a:avLst/>
+          </a:prstGeom>
+          <a:noFill/>
+        </p:spPr>
+        <p:txBody>
+          <a:bodyPr wrap="square" lIns="27432" rIns="27432" tIns="9144">
+            <a:spAutoFit/>
+          </a:bodyPr>
+          <a:lstStyle/>
+          <a:p>
+            <a:pPr>
+              <a:defRPr sz="950" b="0">
+                <a:solidFill>
+                  <a:srgbClr val="5E6877"/>
+                </a:solidFill>
+              </a:defRPr>
+            </a:pPr>
+            <a:r>
+              <a:t>Lectura: contrato mensual, fibra optica y ausencia de soporte/seguridad se ubican por encima de la media de churn. Esto anticipa variables importantes del modelo.</a:t>
+            </a:r>
+          </a:p>
+        </p:txBody>
+      </p:sp>
     </p:spTree>
   </p:cSld>
   <p:clrMapOvr>
@@ -8370,7 +8643,7 @@
               </a:defRPr>
             </a:pPr>
             <a:r>
-              <a:t>3 · EDA</a:t>
+              <a:t>4 - EVALUACION</a:t>
             </a:r>
           </a:p>
         </p:txBody>
@@ -8405,7 +8678,7 @@
               </a:defRPr>
             </a:pPr>
             <a:r>
-              <a:t>El patron principal: clientes nuevos y poco anclados</a:t>
+              <a:t>Por que PR-AUC para modelo y F2 para umbral</a:t>
             </a:r>
           </a:p>
         </p:txBody>
@@ -8445,40 +8718,788 @@
           </a:p>
         </p:txBody>
       </p:sp>
-      <p:pic>
-        <p:nvPicPr>
-          <p:cNvPr id="7" name="Picture 6" descr="eda_target_tenure.png"/>
-          <p:cNvPicPr>
-            <a:picLocks noChangeAspect="1"/>
-          </p:cNvPicPr>
-          <p:nvPr/>
-        </p:nvPicPr>
-        <p:blipFill>
-          <a:blip r:embed="rId2"/>
-          <a:stretch>
-            <a:fillRect/>
-          </a:stretch>
-        </p:blipFill>
-        <p:spPr>
-          <a:xfrm>
-            <a:off x="548640" y="1188720"/>
-            <a:ext cx="4572000" cy="1838533"/>
-          </a:xfrm>
-          <a:prstGeom prst="rect">
-            <a:avLst/>
-          </a:prstGeom>
-        </p:spPr>
-      </p:pic>
-      <p:sp>
-        <p:nvSpPr>
-          <p:cNvPr id="8" name="TextBox 7"/>
-          <p:cNvSpPr txBox="1"/>
-          <p:nvPr/>
-        </p:nvSpPr>
-        <p:spPr>
-          <a:xfrm>
-            <a:off x="5532120" y="1417320"/>
-            <a:ext cx="2971800" cy="2286000"/>
+      <p:sp>
+        <p:nvSpPr>
+          <p:cNvPr id="7" name="Rectangle 6"/>
+          <p:cNvSpPr/>
+          <p:nvPr/>
+        </p:nvSpPr>
+        <p:spPr>
+          <a:xfrm>
+            <a:off x="594360" y="1234440"/>
+            <a:ext cx="1737360" cy="868680"/>
+          </a:xfrm>
+          <a:prstGeom prst="rect">
+            <a:avLst/>
+          </a:prstGeom>
+          <a:solidFill>
+            <a:srgbClr val="FFFFFF"/>
+          </a:solidFill>
+          <a:ln>
+            <a:solidFill>
+              <a:srgbClr val="DCE2EB"/>
+            </a:solidFill>
+          </a:ln>
+        </p:spPr>
+        <p:style>
+          <a:lnRef idx="1">
+            <a:schemeClr val="accent1"/>
+          </a:lnRef>
+          <a:fillRef idx="3">
+            <a:schemeClr val="accent1"/>
+          </a:fillRef>
+          <a:effectRef idx="2">
+            <a:schemeClr val="accent1"/>
+          </a:effectRef>
+          <a:fontRef idx="minor">
+            <a:schemeClr val="lt1"/>
+          </a:fontRef>
+        </p:style>
+        <p:txBody>
+          <a:bodyPr rtlCol="0" anchor="ctr"/>
+          <a:lstStyle/>
+          <a:p>
+            <a:pPr algn="ctr"/>
+          </a:p>
+        </p:txBody>
+      </p:sp>
+      <p:sp>
+        <p:nvSpPr>
+          <p:cNvPr id="8" name="Rectangle 7"/>
+          <p:cNvSpPr/>
+          <p:nvPr/>
+        </p:nvSpPr>
+        <p:spPr>
+          <a:xfrm>
+            <a:off x="594360" y="1234440"/>
+            <a:ext cx="1737360" cy="73152"/>
+          </a:xfrm>
+          <a:prstGeom prst="rect">
+            <a:avLst/>
+          </a:prstGeom>
+          <a:solidFill>
+            <a:srgbClr val="C84752"/>
+          </a:solidFill>
+          <a:ln>
+            <a:noFill/>
+          </a:ln>
+        </p:spPr>
+        <p:style>
+          <a:lnRef idx="1">
+            <a:schemeClr val="accent1"/>
+          </a:lnRef>
+          <a:fillRef idx="3">
+            <a:schemeClr val="accent1"/>
+          </a:fillRef>
+          <a:effectRef idx="2">
+            <a:schemeClr val="accent1"/>
+          </a:effectRef>
+          <a:fontRef idx="minor">
+            <a:schemeClr val="lt1"/>
+          </a:fontRef>
+        </p:style>
+        <p:txBody>
+          <a:bodyPr rtlCol="0" anchor="ctr"/>
+          <a:lstStyle/>
+          <a:p>
+            <a:pPr algn="ctr"/>
+          </a:p>
+        </p:txBody>
+      </p:sp>
+      <p:sp>
+        <p:nvSpPr>
+          <p:cNvPr id="9" name="TextBox 8"/>
+          <p:cNvSpPr txBox="1"/>
+          <p:nvPr/>
+        </p:nvSpPr>
+        <p:spPr>
+          <a:xfrm>
+            <a:off x="731520" y="1380744"/>
+            <a:ext cx="1463039" cy="201168"/>
+          </a:xfrm>
+          <a:prstGeom prst="rect">
+            <a:avLst/>
+          </a:prstGeom>
+          <a:noFill/>
+        </p:spPr>
+        <p:txBody>
+          <a:bodyPr wrap="square" lIns="27432" rIns="27432" tIns="9144">
+            <a:spAutoFit/>
+          </a:bodyPr>
+          <a:lstStyle/>
+          <a:p>
+            <a:pPr>
+              <a:defRPr sz="819" b="1">
+                <a:solidFill>
+                  <a:srgbClr val="5E6877"/>
+                </a:solidFill>
+              </a:defRPr>
+            </a:pPr>
+            <a:r>
+              <a:t>DESBALANCE</a:t>
+            </a:r>
+          </a:p>
+        </p:txBody>
+      </p:sp>
+      <p:sp>
+        <p:nvSpPr>
+          <p:cNvPr id="10" name="TextBox 9"/>
+          <p:cNvSpPr txBox="1"/>
+          <p:nvPr/>
+        </p:nvSpPr>
+        <p:spPr>
+          <a:xfrm>
+            <a:off x="731520" y="1618488"/>
+            <a:ext cx="1463039" cy="384048"/>
+          </a:xfrm>
+          <a:prstGeom prst="rect">
+            <a:avLst/>
+          </a:prstGeom>
+          <a:noFill/>
+        </p:spPr>
+        <p:txBody>
+          <a:bodyPr wrap="square" lIns="27432" rIns="27432" tIns="9144">
+            <a:spAutoFit/>
+          </a:bodyPr>
+          <a:lstStyle/>
+          <a:p>
+            <a:pPr>
+              <a:defRPr sz="2000" b="1">
+                <a:solidFill>
+                  <a:srgbClr val="161C27"/>
+                </a:solidFill>
+              </a:defRPr>
+            </a:pPr>
+            <a:r>
+              <a:t>26.5%</a:t>
+            </a:r>
+          </a:p>
+        </p:txBody>
+      </p:sp>
+      <p:sp>
+        <p:nvSpPr>
+          <p:cNvPr id="11" name="TextBox 10"/>
+          <p:cNvSpPr txBox="1"/>
+          <p:nvPr/>
+        </p:nvSpPr>
+        <p:spPr>
+          <a:xfrm>
+            <a:off x="731520" y="2020824"/>
+            <a:ext cx="1463039" cy="45719"/>
+          </a:xfrm>
+          <a:prstGeom prst="rect">
+            <a:avLst/>
+          </a:prstGeom>
+          <a:noFill/>
+        </p:spPr>
+        <p:txBody>
+          <a:bodyPr wrap="square" lIns="27432" rIns="27432" tIns="9144">
+            <a:spAutoFit/>
+          </a:bodyPr>
+          <a:lstStyle/>
+          <a:p>
+            <a:pPr>
+              <a:defRPr sz="919" b="0">
+                <a:solidFill>
+                  <a:srgbClr val="5E6877"/>
+                </a:solidFill>
+              </a:defRPr>
+            </a:pPr>
+            <a:r>
+              <a:t>churn positivo</a:t>
+            </a:r>
+          </a:p>
+        </p:txBody>
+      </p:sp>
+      <p:sp>
+        <p:nvSpPr>
+          <p:cNvPr id="12" name="Rectangle 11"/>
+          <p:cNvSpPr/>
+          <p:nvPr/>
+        </p:nvSpPr>
+        <p:spPr>
+          <a:xfrm>
+            <a:off x="2606040" y="1234440"/>
+            <a:ext cx="1645920" cy="868680"/>
+          </a:xfrm>
+          <a:prstGeom prst="rect">
+            <a:avLst/>
+          </a:prstGeom>
+          <a:solidFill>
+            <a:srgbClr val="FFFFFF"/>
+          </a:solidFill>
+          <a:ln>
+            <a:solidFill>
+              <a:srgbClr val="DCE2EB"/>
+            </a:solidFill>
+          </a:ln>
+        </p:spPr>
+        <p:style>
+          <a:lnRef idx="1">
+            <a:schemeClr val="accent1"/>
+          </a:lnRef>
+          <a:fillRef idx="3">
+            <a:schemeClr val="accent1"/>
+          </a:fillRef>
+          <a:effectRef idx="2">
+            <a:schemeClr val="accent1"/>
+          </a:effectRef>
+          <a:fontRef idx="minor">
+            <a:schemeClr val="lt1"/>
+          </a:fontRef>
+        </p:style>
+        <p:txBody>
+          <a:bodyPr rtlCol="0" anchor="ctr"/>
+          <a:lstStyle/>
+          <a:p>
+            <a:pPr algn="ctr"/>
+          </a:p>
+        </p:txBody>
+      </p:sp>
+      <p:sp>
+        <p:nvSpPr>
+          <p:cNvPr id="13" name="Rectangle 12"/>
+          <p:cNvSpPr/>
+          <p:nvPr/>
+        </p:nvSpPr>
+        <p:spPr>
+          <a:xfrm>
+            <a:off x="2606040" y="1234440"/>
+            <a:ext cx="1645920" cy="73152"/>
+          </a:xfrm>
+          <a:prstGeom prst="rect">
+            <a:avLst/>
+          </a:prstGeom>
+          <a:solidFill>
+            <a:srgbClr val="E77E37"/>
+          </a:solidFill>
+          <a:ln>
+            <a:noFill/>
+          </a:ln>
+        </p:spPr>
+        <p:style>
+          <a:lnRef idx="1">
+            <a:schemeClr val="accent1"/>
+          </a:lnRef>
+          <a:fillRef idx="3">
+            <a:schemeClr val="accent1"/>
+          </a:fillRef>
+          <a:effectRef idx="2">
+            <a:schemeClr val="accent1"/>
+          </a:effectRef>
+          <a:fontRef idx="minor">
+            <a:schemeClr val="lt1"/>
+          </a:fontRef>
+        </p:style>
+        <p:txBody>
+          <a:bodyPr rtlCol="0" anchor="ctr"/>
+          <a:lstStyle/>
+          <a:p>
+            <a:pPr algn="ctr"/>
+          </a:p>
+        </p:txBody>
+      </p:sp>
+      <p:sp>
+        <p:nvSpPr>
+          <p:cNvPr id="14" name="TextBox 13"/>
+          <p:cNvSpPr txBox="1"/>
+          <p:nvPr/>
+        </p:nvSpPr>
+        <p:spPr>
+          <a:xfrm>
+            <a:off x="2743200" y="1380744"/>
+            <a:ext cx="1371600" cy="201168"/>
+          </a:xfrm>
+          <a:prstGeom prst="rect">
+            <a:avLst/>
+          </a:prstGeom>
+          <a:noFill/>
+        </p:spPr>
+        <p:txBody>
+          <a:bodyPr wrap="square" lIns="27432" rIns="27432" tIns="9144">
+            <a:spAutoFit/>
+          </a:bodyPr>
+          <a:lstStyle/>
+          <a:p>
+            <a:pPr>
+              <a:defRPr sz="819" b="1">
+                <a:solidFill>
+                  <a:srgbClr val="5E6877"/>
+                </a:solidFill>
+              </a:defRPr>
+            </a:pPr>
+            <a:r>
+              <a:t>NO SKILL</a:t>
+            </a:r>
+          </a:p>
+        </p:txBody>
+      </p:sp>
+      <p:sp>
+        <p:nvSpPr>
+          <p:cNvPr id="15" name="TextBox 14"/>
+          <p:cNvSpPr txBox="1"/>
+          <p:nvPr/>
+        </p:nvSpPr>
+        <p:spPr>
+          <a:xfrm>
+            <a:off x="2743200" y="1618488"/>
+            <a:ext cx="1371600" cy="384048"/>
+          </a:xfrm>
+          <a:prstGeom prst="rect">
+            <a:avLst/>
+          </a:prstGeom>
+          <a:noFill/>
+        </p:spPr>
+        <p:txBody>
+          <a:bodyPr wrap="square" lIns="27432" rIns="27432" tIns="9144">
+            <a:spAutoFit/>
+          </a:bodyPr>
+          <a:lstStyle/>
+          <a:p>
+            <a:pPr>
+              <a:defRPr sz="2000" b="1">
+                <a:solidFill>
+                  <a:srgbClr val="161C27"/>
+                </a:solidFill>
+              </a:defRPr>
+            </a:pPr>
+            <a:r>
+              <a:t>0.265</a:t>
+            </a:r>
+          </a:p>
+        </p:txBody>
+      </p:sp>
+      <p:sp>
+        <p:nvSpPr>
+          <p:cNvPr id="16" name="TextBox 15"/>
+          <p:cNvSpPr txBox="1"/>
+          <p:nvPr/>
+        </p:nvSpPr>
+        <p:spPr>
+          <a:xfrm>
+            <a:off x="2743200" y="2020824"/>
+            <a:ext cx="1371600" cy="45719"/>
+          </a:xfrm>
+          <a:prstGeom prst="rect">
+            <a:avLst/>
+          </a:prstGeom>
+          <a:noFill/>
+        </p:spPr>
+        <p:txBody>
+          <a:bodyPr wrap="square" lIns="27432" rIns="27432" tIns="9144">
+            <a:spAutoFit/>
+          </a:bodyPr>
+          <a:lstStyle/>
+          <a:p>
+            <a:pPr>
+              <a:defRPr sz="919" b="0">
+                <a:solidFill>
+                  <a:srgbClr val="5E6877"/>
+                </a:solidFill>
+              </a:defRPr>
+            </a:pPr>
+            <a:r>
+              <a:t>PR-AUC base</a:t>
+            </a:r>
+          </a:p>
+        </p:txBody>
+      </p:sp>
+      <p:sp>
+        <p:nvSpPr>
+          <p:cNvPr id="17" name="Rectangle 16"/>
+          <p:cNvSpPr/>
+          <p:nvPr/>
+        </p:nvSpPr>
+        <p:spPr>
+          <a:xfrm>
+            <a:off x="4526280" y="1234440"/>
+            <a:ext cx="1645920" cy="868680"/>
+          </a:xfrm>
+          <a:prstGeom prst="rect">
+            <a:avLst/>
+          </a:prstGeom>
+          <a:solidFill>
+            <a:srgbClr val="FFFFFF"/>
+          </a:solidFill>
+          <a:ln>
+            <a:solidFill>
+              <a:srgbClr val="DCE2EB"/>
+            </a:solidFill>
+          </a:ln>
+        </p:spPr>
+        <p:style>
+          <a:lnRef idx="1">
+            <a:schemeClr val="accent1"/>
+          </a:lnRef>
+          <a:fillRef idx="3">
+            <a:schemeClr val="accent1"/>
+          </a:fillRef>
+          <a:effectRef idx="2">
+            <a:schemeClr val="accent1"/>
+          </a:effectRef>
+          <a:fontRef idx="minor">
+            <a:schemeClr val="lt1"/>
+          </a:fontRef>
+        </p:style>
+        <p:txBody>
+          <a:bodyPr rtlCol="0" anchor="ctr"/>
+          <a:lstStyle/>
+          <a:p>
+            <a:pPr algn="ctr"/>
+          </a:p>
+        </p:txBody>
+      </p:sp>
+      <p:sp>
+        <p:nvSpPr>
+          <p:cNvPr id="18" name="Rectangle 17"/>
+          <p:cNvSpPr/>
+          <p:nvPr/>
+        </p:nvSpPr>
+        <p:spPr>
+          <a:xfrm>
+            <a:off x="4526280" y="1234440"/>
+            <a:ext cx="1645920" cy="73152"/>
+          </a:xfrm>
+          <a:prstGeom prst="rect">
+            <a:avLst/>
+          </a:prstGeom>
+          <a:solidFill>
+            <a:srgbClr val="2356C2"/>
+          </a:solidFill>
+          <a:ln>
+            <a:noFill/>
+          </a:ln>
+        </p:spPr>
+        <p:style>
+          <a:lnRef idx="1">
+            <a:schemeClr val="accent1"/>
+          </a:lnRef>
+          <a:fillRef idx="3">
+            <a:schemeClr val="accent1"/>
+          </a:fillRef>
+          <a:effectRef idx="2">
+            <a:schemeClr val="accent1"/>
+          </a:effectRef>
+          <a:fontRef idx="minor">
+            <a:schemeClr val="lt1"/>
+          </a:fontRef>
+        </p:style>
+        <p:txBody>
+          <a:bodyPr rtlCol="0" anchor="ctr"/>
+          <a:lstStyle/>
+          <a:p>
+            <a:pPr algn="ctr"/>
+          </a:p>
+        </p:txBody>
+      </p:sp>
+      <p:sp>
+        <p:nvSpPr>
+          <p:cNvPr id="19" name="TextBox 18"/>
+          <p:cNvSpPr txBox="1"/>
+          <p:nvPr/>
+        </p:nvSpPr>
+        <p:spPr>
+          <a:xfrm>
+            <a:off x="4663440" y="1380744"/>
+            <a:ext cx="1371600" cy="201168"/>
+          </a:xfrm>
+          <a:prstGeom prst="rect">
+            <a:avLst/>
+          </a:prstGeom>
+          <a:noFill/>
+        </p:spPr>
+        <p:txBody>
+          <a:bodyPr wrap="square" lIns="27432" rIns="27432" tIns="9144">
+            <a:spAutoFit/>
+          </a:bodyPr>
+          <a:lstStyle/>
+          <a:p>
+            <a:pPr>
+              <a:defRPr sz="819" b="1">
+                <a:solidFill>
+                  <a:srgbClr val="5E6877"/>
+                </a:solidFill>
+              </a:defRPr>
+            </a:pPr>
+            <a:r>
+              <a:t>PR-AUC</a:t>
+            </a:r>
+          </a:p>
+        </p:txBody>
+      </p:sp>
+      <p:sp>
+        <p:nvSpPr>
+          <p:cNvPr id="20" name="TextBox 19"/>
+          <p:cNvSpPr txBox="1"/>
+          <p:nvPr/>
+        </p:nvSpPr>
+        <p:spPr>
+          <a:xfrm>
+            <a:off x="4663440" y="1618488"/>
+            <a:ext cx="1371600" cy="384048"/>
+          </a:xfrm>
+          <a:prstGeom prst="rect">
+            <a:avLst/>
+          </a:prstGeom>
+          <a:noFill/>
+        </p:spPr>
+        <p:txBody>
+          <a:bodyPr wrap="square" lIns="27432" rIns="27432" tIns="9144">
+            <a:spAutoFit/>
+          </a:bodyPr>
+          <a:lstStyle/>
+          <a:p>
+            <a:pPr>
+              <a:defRPr sz="2000" b="1">
+                <a:solidFill>
+                  <a:srgbClr val="161C27"/>
+                </a:solidFill>
+              </a:defRPr>
+            </a:pPr>
+            <a:r>
+              <a:t>ranking</a:t>
+            </a:r>
+          </a:p>
+        </p:txBody>
+      </p:sp>
+      <p:sp>
+        <p:nvSpPr>
+          <p:cNvPr id="21" name="TextBox 20"/>
+          <p:cNvSpPr txBox="1"/>
+          <p:nvPr/>
+        </p:nvSpPr>
+        <p:spPr>
+          <a:xfrm>
+            <a:off x="4663440" y="2020824"/>
+            <a:ext cx="1371600" cy="45719"/>
+          </a:xfrm>
+          <a:prstGeom prst="rect">
+            <a:avLst/>
+          </a:prstGeom>
+          <a:noFill/>
+        </p:spPr>
+        <p:txBody>
+          <a:bodyPr wrap="square" lIns="27432" rIns="27432" tIns="9144">
+            <a:spAutoFit/>
+          </a:bodyPr>
+          <a:lstStyle/>
+          <a:p>
+            <a:pPr>
+              <a:defRPr sz="919" b="0">
+                <a:solidFill>
+                  <a:srgbClr val="5E6877"/>
+                </a:solidFill>
+              </a:defRPr>
+            </a:pPr>
+            <a:r>
+              <a:t>compara modelos</a:t>
+            </a:r>
+          </a:p>
+        </p:txBody>
+      </p:sp>
+      <p:sp>
+        <p:nvSpPr>
+          <p:cNvPr id="22" name="Rectangle 21"/>
+          <p:cNvSpPr/>
+          <p:nvPr/>
+        </p:nvSpPr>
+        <p:spPr>
+          <a:xfrm>
+            <a:off x="6446520" y="1234440"/>
+            <a:ext cx="1645920" cy="868680"/>
+          </a:xfrm>
+          <a:prstGeom prst="rect">
+            <a:avLst/>
+          </a:prstGeom>
+          <a:solidFill>
+            <a:srgbClr val="FFFFFF"/>
+          </a:solidFill>
+          <a:ln>
+            <a:solidFill>
+              <a:srgbClr val="DCE2EB"/>
+            </a:solidFill>
+          </a:ln>
+        </p:spPr>
+        <p:style>
+          <a:lnRef idx="1">
+            <a:schemeClr val="accent1"/>
+          </a:lnRef>
+          <a:fillRef idx="3">
+            <a:schemeClr val="accent1"/>
+          </a:fillRef>
+          <a:effectRef idx="2">
+            <a:schemeClr val="accent1"/>
+          </a:effectRef>
+          <a:fontRef idx="minor">
+            <a:schemeClr val="lt1"/>
+          </a:fontRef>
+        </p:style>
+        <p:txBody>
+          <a:bodyPr rtlCol="0" anchor="ctr"/>
+          <a:lstStyle/>
+          <a:p>
+            <a:pPr algn="ctr"/>
+          </a:p>
+        </p:txBody>
+      </p:sp>
+      <p:sp>
+        <p:nvSpPr>
+          <p:cNvPr id="23" name="Rectangle 22"/>
+          <p:cNvSpPr/>
+          <p:nvPr/>
+        </p:nvSpPr>
+        <p:spPr>
+          <a:xfrm>
+            <a:off x="6446520" y="1234440"/>
+            <a:ext cx="1645920" cy="73152"/>
+          </a:xfrm>
+          <a:prstGeom prst="rect">
+            <a:avLst/>
+          </a:prstGeom>
+          <a:solidFill>
+            <a:srgbClr val="3C9A60"/>
+          </a:solidFill>
+          <a:ln>
+            <a:noFill/>
+          </a:ln>
+        </p:spPr>
+        <p:style>
+          <a:lnRef idx="1">
+            <a:schemeClr val="accent1"/>
+          </a:lnRef>
+          <a:fillRef idx="3">
+            <a:schemeClr val="accent1"/>
+          </a:fillRef>
+          <a:effectRef idx="2">
+            <a:schemeClr val="accent1"/>
+          </a:effectRef>
+          <a:fontRef idx="minor">
+            <a:schemeClr val="lt1"/>
+          </a:fontRef>
+        </p:style>
+        <p:txBody>
+          <a:bodyPr rtlCol="0" anchor="ctr"/>
+          <a:lstStyle/>
+          <a:p>
+            <a:pPr algn="ctr"/>
+          </a:p>
+        </p:txBody>
+      </p:sp>
+      <p:sp>
+        <p:nvSpPr>
+          <p:cNvPr id="24" name="TextBox 23"/>
+          <p:cNvSpPr txBox="1"/>
+          <p:nvPr/>
+        </p:nvSpPr>
+        <p:spPr>
+          <a:xfrm>
+            <a:off x="6583680" y="1380744"/>
+            <a:ext cx="1371600" cy="201168"/>
+          </a:xfrm>
+          <a:prstGeom prst="rect">
+            <a:avLst/>
+          </a:prstGeom>
+          <a:noFill/>
+        </p:spPr>
+        <p:txBody>
+          <a:bodyPr wrap="square" lIns="27432" rIns="27432" tIns="9144">
+            <a:spAutoFit/>
+          </a:bodyPr>
+          <a:lstStyle/>
+          <a:p>
+            <a:pPr>
+              <a:defRPr sz="819" b="1">
+                <a:solidFill>
+                  <a:srgbClr val="5E6877"/>
+                </a:solidFill>
+              </a:defRPr>
+            </a:pPr>
+            <a:r>
+              <a:t>F2</a:t>
+            </a:r>
+          </a:p>
+        </p:txBody>
+      </p:sp>
+      <p:sp>
+        <p:nvSpPr>
+          <p:cNvPr id="25" name="TextBox 24"/>
+          <p:cNvSpPr txBox="1"/>
+          <p:nvPr/>
+        </p:nvSpPr>
+        <p:spPr>
+          <a:xfrm>
+            <a:off x="6583680" y="1618488"/>
+            <a:ext cx="1371600" cy="384048"/>
+          </a:xfrm>
+          <a:prstGeom prst="rect">
+            <a:avLst/>
+          </a:prstGeom>
+          <a:noFill/>
+        </p:spPr>
+        <p:txBody>
+          <a:bodyPr wrap="square" lIns="27432" rIns="27432" tIns="9144">
+            <a:spAutoFit/>
+          </a:bodyPr>
+          <a:lstStyle/>
+          <a:p>
+            <a:pPr>
+              <a:defRPr sz="2000" b="1">
+                <a:solidFill>
+                  <a:srgbClr val="161C27"/>
+                </a:solidFill>
+              </a:defRPr>
+            </a:pPr>
+            <a:r>
+              <a:t>umbral</a:t>
+            </a:r>
+          </a:p>
+        </p:txBody>
+      </p:sp>
+      <p:sp>
+        <p:nvSpPr>
+          <p:cNvPr id="26" name="TextBox 25"/>
+          <p:cNvSpPr txBox="1"/>
+          <p:nvPr/>
+        </p:nvSpPr>
+        <p:spPr>
+          <a:xfrm>
+            <a:off x="6583680" y="2020824"/>
+            <a:ext cx="1371600" cy="45719"/>
+          </a:xfrm>
+          <a:prstGeom prst="rect">
+            <a:avLst/>
+          </a:prstGeom>
+          <a:noFill/>
+        </p:spPr>
+        <p:txBody>
+          <a:bodyPr wrap="square" lIns="27432" rIns="27432" tIns="9144">
+            <a:spAutoFit/>
+          </a:bodyPr>
+          <a:lstStyle/>
+          <a:p>
+            <a:pPr>
+              <a:defRPr sz="919" b="0">
+                <a:solidFill>
+                  <a:srgbClr val="5E6877"/>
+                </a:solidFill>
+              </a:defRPr>
+            </a:pPr>
+            <a:r>
+              <a:t>prioriza recall</a:t>
+            </a:r>
+          </a:p>
+        </p:txBody>
+      </p:sp>
+      <p:sp>
+        <p:nvSpPr>
+          <p:cNvPr id="27" name="TextBox 26"/>
+          <p:cNvSpPr txBox="1"/>
+          <p:nvPr/>
+        </p:nvSpPr>
+        <p:spPr>
+          <a:xfrm>
+            <a:off x="822960" y="2560320"/>
+            <a:ext cx="7406640" cy="1417320"/>
           </a:xfrm>
           <a:prstGeom prst="rect">
             <a:avLst/>
@@ -8502,7 +9523,7 @@
               </a:defRPr>
             </a:pPr>
             <a:r>
-              <a:t>Contrato mensual y baja antiguedad concentran mayor riesgo.</a:t>
+              <a:t>Accuracy engana: predecir siempre No Churn acierta 73,5% pero no detecta ningun churner.</a:t>
             </a:r>
           </a:p>
           <a:p>
@@ -8517,7 +9538,7 @@
               </a:defRPr>
             </a:pPr>
             <a:r>
-              <a:t>Fibra optica aparece como señal predictiva relevante.</a:t>
+              <a:t>PR-AUC evalua si el modelo pone arriba del ranking a los clientes que realmente churnean.</a:t>
             </a:r>
           </a:p>
           <a:p>
@@ -8532,7 +9553,7 @@
               </a:defRPr>
             </a:pPr>
             <a:r>
-              <a:t>Servicios de soporte/seguridad reducen riesgo observado.</a:t>
+              <a:t>F2 se usa despues para elegir el punto de corte: pesa mas recall, pero precision sigue entrando en la formula.</a:t>
             </a:r>
           </a:p>
           <a:p>
@@ -8547,7 +9568,7 @@
               </a:defRPr>
             </a:pPr>
             <a:r>
-              <a:t>Estas relaciones son asociaciones predictivas, no causalidad.</a:t>
+              <a:t>Separar ranking y umbral evita mezclar dos decisiones distintas.</a:t>
             </a:r>
           </a:p>
         </p:txBody>
@@ -8686,7 +9707,7 @@
               </a:defRPr>
             </a:pPr>
             <a:r>
-              <a:t>4 · EVALUACION</a:t>
+              <a:t>4 - EVALUACION</a:t>
             </a:r>
           </a:p>
         </p:txBody>
@@ -8721,7 +9742,7 @@
               </a:defRPr>
             </a:pPr>
             <a:r>
-              <a:t>PR-AUC para elegir modelo; F2 para elegir umbral</a:t>
+              <a:t>Validacion: todo se decide dentro de train</a:t>
             </a:r>
           </a:p>
         </p:txBody>
@@ -8769,8 +9790,8 @@
         </p:nvSpPr>
         <p:spPr>
           <a:xfrm>
-            <a:off x="594360" y="1234440"/>
-            <a:ext cx="1645920" cy="914400"/>
+            <a:off x="685800" y="1234440"/>
+            <a:ext cx="1554480" cy="868680"/>
           </a:xfrm>
           <a:prstGeom prst="rect">
             <a:avLst/>
@@ -8814,8 +9835,8 @@
         </p:nvSpPr>
         <p:spPr>
           <a:xfrm>
-            <a:off x="594360" y="1234440"/>
-            <a:ext cx="1645920" cy="73152"/>
+            <a:off x="685800" y="1234440"/>
+            <a:ext cx="1554480" cy="73152"/>
           </a:xfrm>
           <a:prstGeom prst="rect">
             <a:avLst/>
@@ -8857,8 +9878,8 @@
         </p:nvSpPr>
         <p:spPr>
           <a:xfrm>
-            <a:off x="731520" y="1380744"/>
-            <a:ext cx="1371600" cy="201168"/>
+            <a:off x="822960" y="1380744"/>
+            <a:ext cx="1280160" cy="201168"/>
           </a:xfrm>
           <a:prstGeom prst="rect">
             <a:avLst/>
@@ -8892,8 +9913,8 @@
         </p:nvSpPr>
         <p:spPr>
           <a:xfrm>
-            <a:off x="731520" y="1618488"/>
-            <a:ext cx="1371600" cy="384048"/>
+            <a:off x="822960" y="1618488"/>
+            <a:ext cx="1280160" cy="384048"/>
           </a:xfrm>
           <a:prstGeom prst="rect">
             <a:avLst/>
@@ -8927,8 +9948,8 @@
         </p:nvSpPr>
         <p:spPr>
           <a:xfrm>
-            <a:off x="731520" y="2020824"/>
-            <a:ext cx="1371600" cy="91439"/>
+            <a:off x="822960" y="2020824"/>
+            <a:ext cx="1280160" cy="45719"/>
           </a:xfrm>
           <a:prstGeom prst="rect">
             <a:avLst/>
@@ -8963,7 +9984,7 @@
         <p:spPr>
           <a:xfrm>
             <a:off x="2514600" y="1234440"/>
-            <a:ext cx="1645920" cy="914400"/>
+            <a:ext cx="1554480" cy="868680"/>
           </a:xfrm>
           <a:prstGeom prst="rect">
             <a:avLst/>
@@ -9008,7 +10029,7 @@
         <p:spPr>
           <a:xfrm>
             <a:off x="2514600" y="1234440"/>
-            <a:ext cx="1645920" cy="73152"/>
+            <a:ext cx="1554480" cy="73152"/>
           </a:xfrm>
           <a:prstGeom prst="rect">
             <a:avLst/>
@@ -9051,7 +10072,7 @@
         <p:spPr>
           <a:xfrm>
             <a:off x="2651760" y="1380744"/>
-            <a:ext cx="1371600" cy="201168"/>
+            <a:ext cx="1280160" cy="201168"/>
           </a:xfrm>
           <a:prstGeom prst="rect">
             <a:avLst/>
@@ -9086,7 +10107,7 @@
         <p:spPr>
           <a:xfrm>
             <a:off x="2651760" y="1618488"/>
-            <a:ext cx="1371600" cy="384048"/>
+            <a:ext cx="1280160" cy="384048"/>
           </a:xfrm>
           <a:prstGeom prst="rect">
             <a:avLst/>
@@ -9121,7 +10142,7 @@
         <p:spPr>
           <a:xfrm>
             <a:off x="2651760" y="2020824"/>
-            <a:ext cx="1371600" cy="91439"/>
+            <a:ext cx="1280160" cy="45719"/>
           </a:xfrm>
           <a:prstGeom prst="rect">
             <a:avLst/>
@@ -9155,8 +10176,8 @@
         </p:nvSpPr>
         <p:spPr>
           <a:xfrm>
-            <a:off x="4434840" y="1234440"/>
-            <a:ext cx="1645920" cy="914400"/>
+            <a:off x="4343400" y="1234440"/>
+            <a:ext cx="1554480" cy="868680"/>
           </a:xfrm>
           <a:prstGeom prst="rect">
             <a:avLst/>
@@ -9200,8 +10221,8 @@
         </p:nvSpPr>
         <p:spPr>
           <a:xfrm>
-            <a:off x="4434840" y="1234440"/>
-            <a:ext cx="1645920" cy="73152"/>
+            <a:off x="4343400" y="1234440"/>
+            <a:ext cx="1554480" cy="73152"/>
           </a:xfrm>
           <a:prstGeom prst="rect">
             <a:avLst/>
@@ -9243,8 +10264,8 @@
         </p:nvSpPr>
         <p:spPr>
           <a:xfrm>
-            <a:off x="4572000" y="1380744"/>
-            <a:ext cx="1371600" cy="201168"/>
+            <a:off x="4480560" y="1380744"/>
+            <a:ext cx="1280160" cy="201168"/>
           </a:xfrm>
           <a:prstGeom prst="rect">
             <a:avLst/>
@@ -9278,8 +10299,8 @@
         </p:nvSpPr>
         <p:spPr>
           <a:xfrm>
-            <a:off x="4572000" y="1618488"/>
-            <a:ext cx="1371600" cy="384048"/>
+            <a:off x="4480560" y="1618488"/>
+            <a:ext cx="1280160" cy="384048"/>
           </a:xfrm>
           <a:prstGeom prst="rect">
             <a:avLst/>
@@ -9313,8 +10334,8 @@
         </p:nvSpPr>
         <p:spPr>
           <a:xfrm>
-            <a:off x="4572000" y="2020824"/>
-            <a:ext cx="1371600" cy="91439"/>
+            <a:off x="4480560" y="2020824"/>
+            <a:ext cx="1280160" cy="45719"/>
           </a:xfrm>
           <a:prstGeom prst="rect">
             <a:avLst/>
@@ -9348,8 +10369,8 @@
         </p:nvSpPr>
         <p:spPr>
           <a:xfrm>
-            <a:off x="6355080" y="1234440"/>
-            <a:ext cx="1645920" cy="914400"/>
+            <a:off x="6172200" y="1234440"/>
+            <a:ext cx="1554480" cy="868680"/>
           </a:xfrm>
           <a:prstGeom prst="rect">
             <a:avLst/>
@@ -9393,14 +10414,14 @@
         </p:nvSpPr>
         <p:spPr>
           <a:xfrm>
-            <a:off x="6355080" y="1234440"/>
-            <a:ext cx="1645920" cy="73152"/>
+            <a:off x="6172200" y="1234440"/>
+            <a:ext cx="1554480" cy="73152"/>
           </a:xfrm>
           <a:prstGeom prst="rect">
             <a:avLst/>
           </a:prstGeom>
           <a:solidFill>
-            <a:srgbClr val="C84752"/>
+            <a:srgbClr val="6856CC"/>
           </a:solidFill>
           <a:ln>
             <a:noFill/>
@@ -9436,8 +10457,8 @@
         </p:nvSpPr>
         <p:spPr>
           <a:xfrm>
-            <a:off x="6492240" y="1380744"/>
-            <a:ext cx="1371600" cy="201168"/>
+            <a:off x="6309360" y="1380744"/>
+            <a:ext cx="1280160" cy="201168"/>
           </a:xfrm>
           <a:prstGeom prst="rect">
             <a:avLst/>
@@ -9458,7 +10479,7 @@
               </a:defRPr>
             </a:pPr>
             <a:r>
-              <a:t>NO SKILL</a:t>
+              <a:t>SEED</a:t>
             </a:r>
           </a:p>
         </p:txBody>
@@ -9471,8 +10492,8 @@
         </p:nvSpPr>
         <p:spPr>
           <a:xfrm>
-            <a:off x="6492240" y="1618488"/>
-            <a:ext cx="1371600" cy="384048"/>
+            <a:off x="6309360" y="1618488"/>
+            <a:ext cx="1280160" cy="384048"/>
           </a:xfrm>
           <a:prstGeom prst="rect">
             <a:avLst/>
@@ -9493,7 +10514,7 @@
               </a:defRPr>
             </a:pPr>
             <a:r>
-              <a:t>0.265</a:t>
+              <a:t>42</a:t>
             </a:r>
           </a:p>
         </p:txBody>
@@ -9506,8 +10527,8 @@
         </p:nvSpPr>
         <p:spPr>
           <a:xfrm>
-            <a:off x="6492240" y="2020824"/>
-            <a:ext cx="1371600" cy="91439"/>
+            <a:off x="6309360" y="2020824"/>
+            <a:ext cx="1280160" cy="45719"/>
           </a:xfrm>
           <a:prstGeom prst="rect">
             <a:avLst/>
@@ -9528,7 +10549,7 @@
               </a:defRPr>
             </a:pPr>
             <a:r>
-              <a:t>PR-AUC base</a:t>
+              <a:t>reproducible</a:t>
             </a:r>
           </a:p>
         </p:txBody>
@@ -9541,8 +10562,8 @@
         </p:nvSpPr>
         <p:spPr>
           <a:xfrm>
-            <a:off x="777240" y="2743200"/>
-            <a:ext cx="7680960" cy="1280160"/>
+            <a:off x="868680" y="2606040"/>
+            <a:ext cx="7315200" cy="1325880"/>
           </a:xfrm>
           <a:prstGeom prst="rect">
             <a:avLst/>
@@ -9559,14 +10580,14 @@
               <a:spcAft>
                 <a:spcPts val="500"/>
               </a:spcAft>
-              <a:defRPr sz="1250">
+              <a:defRPr sz="1230">
                 <a:solidFill>
                   <a:srgbClr val="161C27"/>
                 </a:solidFill>
               </a:defRPr>
             </a:pPr>
             <a:r>
-              <a:t>PR-AUC mide la calidad del ranking en una clase positiva minoritaria.</a:t>
+              <a:t>Split estratificado: la proporcion de churn queda estable en train y test.</a:t>
             </a:r>
           </a:p>
           <a:p>
@@ -9574,14 +10595,14 @@
               <a:spcAft>
                 <a:spcPts val="500"/>
               </a:spcAft>
-              <a:defRPr sz="1250">
+              <a:defRPr sz="1230">
                 <a:solidFill>
                   <a:srgbClr val="161C27"/>
                 </a:solidFill>
               </a:defRPr>
             </a:pPr>
             <a:r>
-              <a:t>F2 prioriza recall para el punto operativo, sin ignorar precision.</a:t>
+              <a:t>GridSearchCV: cada modelo se compara con la misma validacion cruzada y la misma metrica PR-AUC.</a:t>
             </a:r>
           </a:p>
           <a:p>
@@ -9589,14 +10610,14 @@
               <a:spcAft>
                 <a:spcPts val="500"/>
               </a:spcAft>
-              <a:defRPr sz="1250">
+              <a:defRPr sz="1230">
                 <a:solidFill>
                   <a:srgbClr val="161C27"/>
                 </a:solidFill>
               </a:defRPr>
             </a:pPr>
             <a:r>
-              <a:t>El test no se usa para tuning, seleccion de modelo ni seleccion de umbral.</a:t>
+              <a:t>Pipeline: imputacion, escalado y one-hot se ajustan dentro de cada fold, evitando leakage de preprocesamiento.</a:t>
             </a:r>
           </a:p>
           <a:p>
@@ -9604,14 +10625,14 @@
               <a:spcAft>
                 <a:spcPts val="500"/>
               </a:spcAft>
-              <a:defRPr sz="1250">
+              <a:defRPr sz="1230">
                 <a:solidFill>
                   <a:srgbClr val="161C27"/>
                 </a:solidFill>
               </a:defRPr>
             </a:pPr>
             <a:r>
-              <a:t>Pipeline: imputacion, escalado y one-hot se ajustan dentro de cada fold.</a:t>
+              <a:t>El umbral se elige en validacion interna del train; el test se usa una sola vez para reportar performance final.</a:t>
             </a:r>
           </a:p>
         </p:txBody>
@@ -9750,7 +10771,7 @@
               </a:defRPr>
             </a:pPr>
             <a:r>
-              <a:t>5 · BASELINE</a:t>
+              <a:t>5 - BASELINE</a:t>
             </a:r>
           </a:p>
         </p:txBody>
@@ -9785,7 +10806,7 @@
               </a:defRPr>
             </a:pPr>
             <a:r>
-              <a:t>La regresion logistica deja una vara alta e interpretable</a:t>
+              <a:t>Baseline paso a paso: Dummy y regresion logistica</a:t>
             </a:r>
           </a:p>
         </p:txBody>
@@ -9833,8 +10854,8 @@
         </p:nvSpPr>
         <p:spPr>
           <a:xfrm>
-            <a:off x="731520" y="1325880"/>
-            <a:ext cx="1828800" cy="914400"/>
+            <a:off x="640080" y="1234440"/>
+            <a:ext cx="1920240" cy="868680"/>
           </a:xfrm>
           <a:prstGeom prst="rect">
             <a:avLst/>
@@ -9878,8 +10899,8 @@
         </p:nvSpPr>
         <p:spPr>
           <a:xfrm>
-            <a:off x="731520" y="1325880"/>
-            <a:ext cx="1828800" cy="73152"/>
+            <a:off x="640080" y="1234440"/>
+            <a:ext cx="1920240" cy="73152"/>
           </a:xfrm>
           <a:prstGeom prst="rect">
             <a:avLst/>
@@ -9921,8 +10942,8 @@
         </p:nvSpPr>
         <p:spPr>
           <a:xfrm>
-            <a:off x="868680" y="1472184"/>
-            <a:ext cx="1554480" cy="201168"/>
+            <a:off x="777240" y="1380744"/>
+            <a:ext cx="1645920" cy="201168"/>
           </a:xfrm>
           <a:prstGeom prst="rect">
             <a:avLst/>
@@ -9943,7 +10964,7 @@
               </a:defRPr>
             </a:pPr>
             <a:r>
-              <a:t>DUMMY PR-AUC</a:t>
+              <a:t>Dummy</a:t>
             </a:r>
           </a:p>
         </p:txBody>
@@ -9956,8 +10977,8 @@
         </p:nvSpPr>
         <p:spPr>
           <a:xfrm>
-            <a:off x="868680" y="1709928"/>
-            <a:ext cx="1554480" cy="384048"/>
+            <a:off x="777240" y="1618488"/>
+            <a:ext cx="1645920" cy="384048"/>
           </a:xfrm>
           <a:prstGeom prst="rect">
             <a:avLst/>
@@ -9991,8 +11012,8 @@
         </p:nvSpPr>
         <p:spPr>
           <a:xfrm>
-            <a:off x="868680" y="2112264"/>
-            <a:ext cx="1554480" cy="91439"/>
+            <a:off x="777240" y="2020824"/>
+            <a:ext cx="1645920" cy="45719"/>
           </a:xfrm>
           <a:prstGeom prst="rect">
             <a:avLst/>
@@ -10013,7 +11034,7 @@
               </a:defRPr>
             </a:pPr>
             <a:r>
-              <a:t>sin informacion</a:t>
+              <a:t>predice clase mayoritaria</a:t>
             </a:r>
           </a:p>
         </p:txBody>
@@ -10026,8 +11047,8 @@
         </p:nvSpPr>
         <p:spPr>
           <a:xfrm>
-            <a:off x="2834640" y="1325880"/>
-            <a:ext cx="1828800" cy="914400"/>
+            <a:off x="2788920" y="1234440"/>
+            <a:ext cx="1920240" cy="868680"/>
           </a:xfrm>
           <a:prstGeom prst="rect">
             <a:avLst/>
@@ -10071,8 +11092,8 @@
         </p:nvSpPr>
         <p:spPr>
           <a:xfrm>
-            <a:off x="2834640" y="1325880"/>
-            <a:ext cx="1828800" cy="73152"/>
+            <a:off x="2788920" y="1234440"/>
+            <a:ext cx="1920240" cy="73152"/>
           </a:xfrm>
           <a:prstGeom prst="rect">
             <a:avLst/>
@@ -10114,8 +11135,8 @@
         </p:nvSpPr>
         <p:spPr>
           <a:xfrm>
-            <a:off x="2971800" y="1472184"/>
-            <a:ext cx="1554480" cy="201168"/>
+            <a:off x="2926079" y="1380744"/>
+            <a:ext cx="1645920" cy="201168"/>
           </a:xfrm>
           <a:prstGeom prst="rect">
             <a:avLst/>
@@ -10136,7 +11157,7 @@
               </a:defRPr>
             </a:pPr>
             <a:r>
-              <a:t>LOGISTIC PR-AUC</a:t>
+              <a:t>Logistic</a:t>
             </a:r>
           </a:p>
         </p:txBody>
@@ -10149,8 +11170,8 @@
         </p:nvSpPr>
         <p:spPr>
           <a:xfrm>
-            <a:off x="2971800" y="1709928"/>
-            <a:ext cx="1554480" cy="384048"/>
+            <a:off x="2926079" y="1618488"/>
+            <a:ext cx="1645920" cy="384048"/>
           </a:xfrm>
           <a:prstGeom prst="rect">
             <a:avLst/>
@@ -10184,8 +11205,8 @@
         </p:nvSpPr>
         <p:spPr>
           <a:xfrm>
-            <a:off x="2971800" y="2112264"/>
-            <a:ext cx="1554480" cy="91439"/>
+            <a:off x="2926079" y="2020824"/>
+            <a:ext cx="1645920" cy="45719"/>
           </a:xfrm>
           <a:prstGeom prst="rect">
             <a:avLst/>
@@ -10206,7 +11227,7 @@
               </a:defRPr>
             </a:pPr>
             <a:r>
-              <a:t>baseline fuerte</a:t>
+              <a:t>PR-AUC CV</a:t>
             </a:r>
           </a:p>
         </p:txBody>
@@ -10219,8 +11240,8 @@
         </p:nvSpPr>
         <p:spPr>
           <a:xfrm>
-            <a:off x="4937760" y="1325880"/>
-            <a:ext cx="1828800" cy="914400"/>
+            <a:off x="4937760" y="1234440"/>
+            <a:ext cx="1920240" cy="868680"/>
           </a:xfrm>
           <a:prstGeom prst="rect">
             <a:avLst/>
@@ -10264,8 +11285,8 @@
         </p:nvSpPr>
         <p:spPr>
           <a:xfrm>
-            <a:off x="4937760" y="1325880"/>
-            <a:ext cx="1828800" cy="73152"/>
+            <a:off x="4937760" y="1234440"/>
+            <a:ext cx="1920240" cy="73152"/>
           </a:xfrm>
           <a:prstGeom prst="rect">
             <a:avLst/>
@@ -10307,8 +11328,8 @@
         </p:nvSpPr>
         <p:spPr>
           <a:xfrm>
-            <a:off x="5074920" y="1472184"/>
-            <a:ext cx="1554480" cy="201168"/>
+            <a:off x="5074920" y="1380744"/>
+            <a:ext cx="1645920" cy="201168"/>
           </a:xfrm>
           <a:prstGeom prst="rect">
             <a:avLst/>
@@ -10329,7 +11350,7 @@
               </a:defRPr>
             </a:pPr>
             <a:r>
-              <a:t>LOGISTIC F2</a:t>
+              <a:t>Predictoras</a:t>
             </a:r>
           </a:p>
         </p:txBody>
@@ -10342,8 +11363,8 @@
         </p:nvSpPr>
         <p:spPr>
           <a:xfrm>
-            <a:off x="5074920" y="1709928"/>
-            <a:ext cx="1554480" cy="384048"/>
+            <a:off x="5074920" y="1618488"/>
+            <a:ext cx="1645920" cy="384048"/>
           </a:xfrm>
           <a:prstGeom prst="rect">
             <a:avLst/>
@@ -10364,6 +11385,199 @@
               </a:defRPr>
             </a:pPr>
             <a:r>
+              <a:t>19</a:t>
+            </a:r>
+          </a:p>
+        </p:txBody>
+      </p:sp>
+      <p:sp>
+        <p:nvSpPr>
+          <p:cNvPr id="21" name="TextBox 20"/>
+          <p:cNvSpPr txBox="1"/>
+          <p:nvPr/>
+        </p:nvSpPr>
+        <p:spPr>
+          <a:xfrm>
+            <a:off x="5074920" y="2020824"/>
+            <a:ext cx="1645920" cy="45719"/>
+          </a:xfrm>
+          <a:prstGeom prst="rect">
+            <a:avLst/>
+          </a:prstGeom>
+          <a:noFill/>
+        </p:spPr>
+        <p:txBody>
+          <a:bodyPr wrap="square" lIns="27432" rIns="27432" tIns="9144">
+            <a:spAutoFit/>
+          </a:bodyPr>
+          <a:lstStyle/>
+          <a:p>
+            <a:pPr>
+              <a:defRPr sz="919" b="0">
+                <a:solidFill>
+                  <a:srgbClr val="5E6877"/>
+                </a:solidFill>
+              </a:defRPr>
+            </a:pPr>
+            <a:r>
+              <a:t>variables originales + FE</a:t>
+            </a:r>
+          </a:p>
+        </p:txBody>
+      </p:sp>
+      <p:sp>
+        <p:nvSpPr>
+          <p:cNvPr id="22" name="Rectangle 21"/>
+          <p:cNvSpPr/>
+          <p:nvPr/>
+        </p:nvSpPr>
+        <p:spPr>
+          <a:xfrm>
+            <a:off x="7086600" y="1234440"/>
+            <a:ext cx="1417320" cy="868680"/>
+          </a:xfrm>
+          <a:prstGeom prst="rect">
+            <a:avLst/>
+          </a:prstGeom>
+          <a:solidFill>
+            <a:srgbClr val="FFFFFF"/>
+          </a:solidFill>
+          <a:ln>
+            <a:solidFill>
+              <a:srgbClr val="DCE2EB"/>
+            </a:solidFill>
+          </a:ln>
+        </p:spPr>
+        <p:style>
+          <a:lnRef idx="1">
+            <a:schemeClr val="accent1"/>
+          </a:lnRef>
+          <a:fillRef idx="3">
+            <a:schemeClr val="accent1"/>
+          </a:fillRef>
+          <a:effectRef idx="2">
+            <a:schemeClr val="accent1"/>
+          </a:effectRef>
+          <a:fontRef idx="minor">
+            <a:schemeClr val="lt1"/>
+          </a:fontRef>
+        </p:style>
+        <p:txBody>
+          <a:bodyPr rtlCol="0" anchor="ctr"/>
+          <a:lstStyle/>
+          <a:p>
+            <a:pPr algn="ctr"/>
+          </a:p>
+        </p:txBody>
+      </p:sp>
+      <p:sp>
+        <p:nvSpPr>
+          <p:cNvPr id="23" name="Rectangle 22"/>
+          <p:cNvSpPr/>
+          <p:nvPr/>
+        </p:nvSpPr>
+        <p:spPr>
+          <a:xfrm>
+            <a:off x="7086600" y="1234440"/>
+            <a:ext cx="1417320" cy="73152"/>
+          </a:xfrm>
+          <a:prstGeom prst="rect">
+            <a:avLst/>
+          </a:prstGeom>
+          <a:solidFill>
+            <a:srgbClr val="E77E37"/>
+          </a:solidFill>
+          <a:ln>
+            <a:noFill/>
+          </a:ln>
+        </p:spPr>
+        <p:style>
+          <a:lnRef idx="1">
+            <a:schemeClr val="accent1"/>
+          </a:lnRef>
+          <a:fillRef idx="3">
+            <a:schemeClr val="accent1"/>
+          </a:fillRef>
+          <a:effectRef idx="2">
+            <a:schemeClr val="accent1"/>
+          </a:effectRef>
+          <a:fontRef idx="minor">
+            <a:schemeClr val="lt1"/>
+          </a:fontRef>
+        </p:style>
+        <p:txBody>
+          <a:bodyPr rtlCol="0" anchor="ctr"/>
+          <a:lstStyle/>
+          <a:p>
+            <a:pPr algn="ctr"/>
+          </a:p>
+        </p:txBody>
+      </p:sp>
+      <p:sp>
+        <p:nvSpPr>
+          <p:cNvPr id="24" name="TextBox 23"/>
+          <p:cNvSpPr txBox="1"/>
+          <p:nvPr/>
+        </p:nvSpPr>
+        <p:spPr>
+          <a:xfrm>
+            <a:off x="7223760" y="1380744"/>
+            <a:ext cx="1143000" cy="201168"/>
+          </a:xfrm>
+          <a:prstGeom prst="rect">
+            <a:avLst/>
+          </a:prstGeom>
+          <a:noFill/>
+        </p:spPr>
+        <p:txBody>
+          <a:bodyPr wrap="square" lIns="27432" rIns="27432" tIns="9144">
+            <a:spAutoFit/>
+          </a:bodyPr>
+          <a:lstStyle/>
+          <a:p>
+            <a:pPr>
+              <a:defRPr sz="819" b="1">
+                <a:solidFill>
+                  <a:srgbClr val="5E6877"/>
+                </a:solidFill>
+              </a:defRPr>
+            </a:pPr>
+            <a:r>
+              <a:t>Logistic F2</a:t>
+            </a:r>
+          </a:p>
+        </p:txBody>
+      </p:sp>
+      <p:sp>
+        <p:nvSpPr>
+          <p:cNvPr id="25" name="TextBox 24"/>
+          <p:cNvSpPr txBox="1"/>
+          <p:nvPr/>
+        </p:nvSpPr>
+        <p:spPr>
+          <a:xfrm>
+            <a:off x="7223760" y="1618488"/>
+            <a:ext cx="1143000" cy="384048"/>
+          </a:xfrm>
+          <a:prstGeom prst="rect">
+            <a:avLst/>
+          </a:prstGeom>
+          <a:noFill/>
+        </p:spPr>
+        <p:txBody>
+          <a:bodyPr wrap="square" lIns="27432" rIns="27432" tIns="9144">
+            <a:spAutoFit/>
+          </a:bodyPr>
+          <a:lstStyle/>
+          <a:p>
+            <a:pPr>
+              <a:defRPr sz="2000" b="1">
+                <a:solidFill>
+                  <a:srgbClr val="161C27"/>
+                </a:solidFill>
+              </a:defRPr>
+            </a:pPr>
+            <a:r>
               <a:t>0.718</a:t>
             </a:r>
           </a:p>
@@ -10371,14 +11585,14 @@
       </p:sp>
       <p:sp>
         <p:nvSpPr>
-          <p:cNvPr id="21" name="TextBox 20"/>
-          <p:cNvSpPr txBox="1"/>
-          <p:nvPr/>
-        </p:nvSpPr>
-        <p:spPr>
-          <a:xfrm>
-            <a:off x="5074920" y="2112264"/>
-            <a:ext cx="1554480" cy="91439"/>
+          <p:cNvPr id="26" name="TextBox 25"/>
+          <p:cNvSpPr txBox="1"/>
+          <p:nvPr/>
+        </p:nvSpPr>
+        <p:spPr>
+          <a:xfrm>
+            <a:off x="7223760" y="2020824"/>
+            <a:ext cx="1143000" cy="45719"/>
           </a:xfrm>
           <a:prstGeom prst="rect">
             <a:avLst/>
@@ -10399,21 +11613,21 @@
               </a:defRPr>
             </a:pPr>
             <a:r>
-              <a:t>recall alto</a:t>
-            </a:r>
-          </a:p>
-        </p:txBody>
-      </p:sp>
-      <p:sp>
-        <p:nvSpPr>
-          <p:cNvPr id="22" name="TextBox 21"/>
-          <p:cNvSpPr txBox="1"/>
-          <p:nvPr/>
-        </p:nvSpPr>
-        <p:spPr>
-          <a:xfrm>
-            <a:off x="960120" y="2788920"/>
-            <a:ext cx="7223760" cy="1143000"/>
+              <a:t>baseline fuerte</a:t>
+            </a:r>
+          </a:p>
+        </p:txBody>
+      </p:sp>
+      <p:sp>
+        <p:nvSpPr>
+          <p:cNvPr id="27" name="TextBox 26"/>
+          <p:cNvSpPr txBox="1"/>
+          <p:nvPr/>
+        </p:nvSpPr>
+        <p:spPr>
+          <a:xfrm>
+            <a:off x="777240" y="2514600"/>
+            <a:ext cx="7680960" cy="1554480"/>
           </a:xfrm>
           <a:prstGeom prst="rect">
             <a:avLst/>
@@ -10430,14 +11644,14 @@
               <a:spcAft>
                 <a:spcPts val="500"/>
               </a:spcAft>
-              <a:defRPr sz="1300">
+              <a:defRPr sz="1220">
                 <a:solidFill>
                   <a:srgbClr val="161C27"/>
                 </a:solidFill>
               </a:defRPr>
             </a:pPr>
             <a:r>
-              <a:t>La logistica queda cerca de CatBoost: el problema tiene señal lineal fuerte.</a:t>
+              <a:t>1. Dummy sirve como piso: si un modelo no supera la prevalencia en PR-AUC, no aporta informacion.</a:t>
             </a:r>
           </a:p>
           <a:p>
@@ -10445,14 +11659,14 @@
               <a:spcAft>
                 <a:spcPts val="500"/>
               </a:spcAft>
-              <a:defRPr sz="1300">
+              <a:defRPr sz="1220">
                 <a:solidFill>
                   <a:srgbClr val="161C27"/>
                 </a:solidFill>
               </a:defRPr>
             </a:pPr>
             <a:r>
-              <a:t>Se usa como baseline interpretable para exigir que modelos complejos justifiquen su mejora.</a:t>
+              <a:t>2. Regresion logistica es baseline real: simple, interpretable y rapida de entrenar.</a:t>
             </a:r>
           </a:p>
           <a:p>
@@ -10460,14 +11674,29 @@
               <a:spcAft>
                 <a:spcPts val="500"/>
               </a:spcAft>
-              <a:defRPr sz="1300">
+              <a:defRPr sz="1220">
                 <a:solidFill>
                   <a:srgbClr val="161C27"/>
                 </a:solidFill>
               </a:defRPr>
             </a:pPr>
             <a:r>
-              <a:t>El dummy confirma que accuracy no alcanza: predecir siempre No Churn no sirve para retener.</a:t>
+              <a:t>3. Usa el mismo pipeline y las mismas variables que los modelos complejos, por eso la comparacion es justa.</a:t>
+            </a:r>
+          </a:p>
+          <a:p>
+            <a:pPr>
+              <a:spcAft>
+                <a:spcPts val="500"/>
+              </a:spcAft>
+              <a:defRPr sz="1220">
+                <a:solidFill>
+                  <a:srgbClr val="161C27"/>
+                </a:solidFill>
+              </a:defRPr>
+            </a:pPr>
+            <a:r>
+              <a:t>4. Queda cerca del ganador, lo que muestra que el problema tiene senal clara y no depende solo de modelos sofisticados.</a:t>
             </a:r>
           </a:p>
         </p:txBody>
@@ -10606,7 +11835,7 @@
               </a:defRPr>
             </a:pPr>
             <a:r>
-              <a:t>6 · SELECCION DE MODELOS</a:t>
+              <a:t>6 - SELECCION DE MODELOS</a:t>
             </a:r>
           </a:p>
         </p:txBody>
@@ -10697,8 +11926,8 @@
         </p:blipFill>
         <p:spPr>
           <a:xfrm>
-            <a:off x="502920" y="1115568"/>
-            <a:ext cx="5897880" cy="3398407"/>
+            <a:off x="502920" y="1024128"/>
+            <a:ext cx="5349240" cy="3082276"/>
           </a:xfrm>
           <a:prstGeom prst="rect">
             <a:avLst/>
@@ -10707,614 +11936,118 @@
       </p:pic>
       <p:sp>
         <p:nvSpPr>
-          <p:cNvPr id="8" name="Rectangle 7"/>
-          <p:cNvSpPr/>
-          <p:nvPr/>
-        </p:nvSpPr>
-        <p:spPr>
-          <a:xfrm>
-            <a:off x="6629400" y="1325880"/>
-            <a:ext cx="2057400" cy="713232"/>
-          </a:xfrm>
-          <a:prstGeom prst="rect">
-            <a:avLst/>
-          </a:prstGeom>
-          <a:solidFill>
-            <a:srgbClr val="FFFFFF"/>
-          </a:solidFill>
-          <a:ln>
-            <a:solidFill>
-              <a:srgbClr val="DCE2EB"/>
-            </a:solidFill>
-          </a:ln>
-        </p:spPr>
-        <p:style>
-          <a:lnRef idx="1">
-            <a:schemeClr val="accent1"/>
-          </a:lnRef>
-          <a:fillRef idx="3">
-            <a:schemeClr val="accent1"/>
-          </a:fillRef>
-          <a:effectRef idx="2">
-            <a:schemeClr val="accent1"/>
-          </a:effectRef>
-          <a:fontRef idx="minor">
-            <a:schemeClr val="lt1"/>
-          </a:fontRef>
-        </p:style>
-        <p:txBody>
-          <a:bodyPr rtlCol="0" anchor="ctr"/>
-          <a:lstStyle/>
-          <a:p>
-            <a:pPr algn="ctr"/>
-          </a:p>
-        </p:txBody>
-      </p:sp>
-      <p:sp>
-        <p:nvSpPr>
-          <p:cNvPr id="9" name="Rectangle 8"/>
-          <p:cNvSpPr/>
-          <p:nvPr/>
-        </p:nvSpPr>
-        <p:spPr>
-          <a:xfrm>
-            <a:off x="6629400" y="1325880"/>
-            <a:ext cx="2057400" cy="73152"/>
-          </a:xfrm>
-          <a:prstGeom prst="rect">
-            <a:avLst/>
-          </a:prstGeom>
-          <a:solidFill>
-            <a:srgbClr val="E77E37"/>
-          </a:solidFill>
-          <a:ln>
-            <a:noFill/>
-          </a:ln>
-        </p:spPr>
-        <p:style>
-          <a:lnRef idx="1">
-            <a:schemeClr val="accent1"/>
-          </a:lnRef>
-          <a:fillRef idx="3">
-            <a:schemeClr val="accent1"/>
-          </a:fillRef>
-          <a:effectRef idx="2">
-            <a:schemeClr val="accent1"/>
-          </a:effectRef>
-          <a:fontRef idx="minor">
-            <a:schemeClr val="lt1"/>
-          </a:fontRef>
-        </p:style>
-        <p:txBody>
-          <a:bodyPr rtlCol="0" anchor="ctr"/>
-          <a:lstStyle/>
-          <a:p>
-            <a:pPr algn="ctr"/>
-          </a:p>
-        </p:txBody>
-      </p:sp>
-      <p:sp>
-        <p:nvSpPr>
-          <p:cNvPr id="10" name="TextBox 9"/>
-          <p:cNvSpPr txBox="1"/>
-          <p:nvPr/>
-        </p:nvSpPr>
-        <p:spPr>
-          <a:xfrm>
-            <a:off x="6766560" y="1472184"/>
-            <a:ext cx="1783080" cy="201168"/>
-          </a:xfrm>
-          <a:prstGeom prst="rect">
-            <a:avLst/>
-          </a:prstGeom>
-          <a:noFill/>
-        </p:spPr>
-        <p:txBody>
-          <a:bodyPr wrap="square" lIns="27432" rIns="27432" tIns="9144">
-            <a:spAutoFit/>
-          </a:bodyPr>
-          <a:lstStyle/>
-          <a:p>
-            <a:pPr>
-              <a:defRPr sz="819" b="1">
+          <p:cNvPr id="8" name="TextBox 7"/>
+          <p:cNvSpPr txBox="1"/>
+          <p:nvPr/>
+        </p:nvSpPr>
+        <p:spPr>
+          <a:xfrm>
+            <a:off x="5989320" y="1261872"/>
+            <a:ext cx="2743200" cy="2423160"/>
+          </a:xfrm>
+          <a:prstGeom prst="rect">
+            <a:avLst/>
+          </a:prstGeom>
+          <a:noFill/>
+        </p:spPr>
+        <p:txBody>
+          <a:bodyPr wrap="square">
+            <a:spAutoFit/>
+          </a:bodyPr>
+          <a:lstStyle/>
+          <a:p>
+            <a:pPr>
+              <a:spcAft>
+                <a:spcPts val="500"/>
+              </a:spcAft>
+              <a:defRPr sz="1120">
+                <a:solidFill>
+                  <a:srgbClr val="161C27"/>
+                </a:solidFill>
+              </a:defRPr>
+            </a:pPr>
+            <a:r>
+              <a:t>CatBoost queda primero por PR-AUC, pero la diferencia con Gradient Boosting y Logistic es chica.</a:t>
+            </a:r>
+          </a:p>
+          <a:p>
+            <a:pPr>
+              <a:spcAft>
+                <a:spcPts val="500"/>
+              </a:spcAft>
+              <a:defRPr sz="1120">
+                <a:solidFill>
+                  <a:srgbClr val="161C27"/>
+                </a:solidFill>
+              </a:defRPr>
+            </a:pPr>
+            <a:r>
+              <a:t>Gradient Boosting clasico logra mayor precision, pero menor recall: es mas conservador.</a:t>
+            </a:r>
+          </a:p>
+          <a:p>
+            <a:pPr>
+              <a:spcAft>
+                <a:spcPts val="500"/>
+              </a:spcAft>
+              <a:defRPr sz="1120">
+                <a:solidFill>
+                  <a:srgbClr val="161C27"/>
+                </a:solidFill>
+              </a:defRPr>
+            </a:pPr>
+            <a:r>
+              <a:t>Logistic Regression confirma una senal lineal fuerte y funciona como alternativa simple de defensa.</a:t>
+            </a:r>
+          </a:p>
+          <a:p>
+            <a:pPr>
+              <a:spcAft>
+                <a:spcPts val="500"/>
+              </a:spcAft>
+              <a:defRPr sz="1120">
+                <a:solidFill>
+                  <a:srgbClr val="161C27"/>
+                </a:solidFill>
+              </a:defRPr>
+            </a:pPr>
+            <a:r>
+              <a:t>LightGBM fue probado; en esta grilla no supera a CatBoost ni a los baselines fuertes.</a:t>
+            </a:r>
+          </a:p>
+        </p:txBody>
+      </p:sp>
+      <p:sp>
+        <p:nvSpPr>
+          <p:cNvPr id="9" name="TextBox 8"/>
+          <p:cNvSpPr txBox="1"/>
+          <p:nvPr/>
+        </p:nvSpPr>
+        <p:spPr>
+          <a:xfrm>
+            <a:off x="5989320" y="4069080"/>
+            <a:ext cx="2743200" cy="411480"/>
+          </a:xfrm>
+          <a:prstGeom prst="rect">
+            <a:avLst/>
+          </a:prstGeom>
+          <a:noFill/>
+        </p:spPr>
+        <p:txBody>
+          <a:bodyPr wrap="square" lIns="27432" rIns="27432" tIns="9144">
+            <a:spAutoFit/>
+          </a:bodyPr>
+          <a:lstStyle/>
+          <a:p>
+            <a:pPr>
+              <a:defRPr sz="950" b="0">
                 <a:solidFill>
                   <a:srgbClr val="5E6877"/>
                 </a:solidFill>
               </a:defRPr>
             </a:pPr>
             <a:r>
-              <a:t>catboost</a:t>
-            </a:r>
-          </a:p>
-        </p:txBody>
-      </p:sp>
-      <p:sp>
-        <p:nvSpPr>
-          <p:cNvPr id="11" name="TextBox 10"/>
-          <p:cNvSpPr txBox="1"/>
-          <p:nvPr/>
-        </p:nvSpPr>
-        <p:spPr>
-          <a:xfrm>
-            <a:off x="6766560" y="1709928"/>
-            <a:ext cx="1783080" cy="384048"/>
-          </a:xfrm>
-          <a:prstGeom prst="rect">
-            <a:avLst/>
-          </a:prstGeom>
-          <a:noFill/>
-        </p:spPr>
-        <p:txBody>
-          <a:bodyPr wrap="square" lIns="27432" rIns="27432" tIns="9144">
-            <a:spAutoFit/>
-          </a:bodyPr>
-          <a:lstStyle/>
-          <a:p>
-            <a:pPr>
-              <a:defRPr sz="2000" b="1">
-                <a:solidFill>
-                  <a:srgbClr val="161C27"/>
-                </a:solidFill>
-              </a:defRPr>
-            </a:pPr>
-            <a:r>
-              <a:t>0.667</a:t>
-            </a:r>
-          </a:p>
-        </p:txBody>
-      </p:sp>
-      <p:sp>
-        <p:nvSpPr>
-          <p:cNvPr id="12" name="TextBox 11"/>
-          <p:cNvSpPr txBox="1"/>
-          <p:nvPr/>
-        </p:nvSpPr>
-        <p:spPr>
-          <a:xfrm>
-            <a:off x="6766560" y="2112264"/>
-            <a:ext cx="1783080" cy="-109728"/>
-          </a:xfrm>
-          <a:prstGeom prst="rect">
-            <a:avLst/>
-          </a:prstGeom>
-          <a:noFill/>
-        </p:spPr>
-        <p:txBody>
-          <a:bodyPr wrap="square" lIns="27432" rIns="27432" tIns="9144">
-            <a:spAutoFit/>
-          </a:bodyPr>
-          <a:lstStyle/>
-          <a:p>
-            <a:pPr>
-              <a:defRPr sz="919" b="0">
-                <a:solidFill>
-                  <a:srgbClr val="5E6877"/>
-                </a:solidFill>
-              </a:defRPr>
-            </a:pPr>
-            <a:r>
-              <a:t>F2 0.731 · Precision 0.521</a:t>
-            </a:r>
-          </a:p>
-        </p:txBody>
-      </p:sp>
-      <p:sp>
-        <p:nvSpPr>
-          <p:cNvPr id="13" name="Rectangle 12"/>
-          <p:cNvSpPr/>
-          <p:nvPr/>
-        </p:nvSpPr>
-        <p:spPr>
-          <a:xfrm>
-            <a:off x="6629400" y="2194560"/>
-            <a:ext cx="2057400" cy="713232"/>
-          </a:xfrm>
-          <a:prstGeom prst="rect">
-            <a:avLst/>
-          </a:prstGeom>
-          <a:solidFill>
-            <a:srgbClr val="FFFFFF"/>
-          </a:solidFill>
-          <a:ln>
-            <a:solidFill>
-              <a:srgbClr val="DCE2EB"/>
-            </a:solidFill>
-          </a:ln>
-        </p:spPr>
-        <p:style>
-          <a:lnRef idx="1">
-            <a:schemeClr val="accent1"/>
-          </a:lnRef>
-          <a:fillRef idx="3">
-            <a:schemeClr val="accent1"/>
-          </a:fillRef>
-          <a:effectRef idx="2">
-            <a:schemeClr val="accent1"/>
-          </a:effectRef>
-          <a:fontRef idx="minor">
-            <a:schemeClr val="lt1"/>
-          </a:fontRef>
-        </p:style>
-        <p:txBody>
-          <a:bodyPr rtlCol="0" anchor="ctr"/>
-          <a:lstStyle/>
-          <a:p>
-            <a:pPr algn="ctr"/>
-          </a:p>
-        </p:txBody>
-      </p:sp>
-      <p:sp>
-        <p:nvSpPr>
-          <p:cNvPr id="14" name="Rectangle 13"/>
-          <p:cNvSpPr/>
-          <p:nvPr/>
-        </p:nvSpPr>
-        <p:spPr>
-          <a:xfrm>
-            <a:off x="6629400" y="2194560"/>
-            <a:ext cx="2057400" cy="73152"/>
-          </a:xfrm>
-          <a:prstGeom prst="rect">
-            <a:avLst/>
-          </a:prstGeom>
-          <a:solidFill>
-            <a:srgbClr val="2356C2"/>
-          </a:solidFill>
-          <a:ln>
-            <a:noFill/>
-          </a:ln>
-        </p:spPr>
-        <p:style>
-          <a:lnRef idx="1">
-            <a:schemeClr val="accent1"/>
-          </a:lnRef>
-          <a:fillRef idx="3">
-            <a:schemeClr val="accent1"/>
-          </a:fillRef>
-          <a:effectRef idx="2">
-            <a:schemeClr val="accent1"/>
-          </a:effectRef>
-          <a:fontRef idx="minor">
-            <a:schemeClr val="lt1"/>
-          </a:fontRef>
-        </p:style>
-        <p:txBody>
-          <a:bodyPr rtlCol="0" anchor="ctr"/>
-          <a:lstStyle/>
-          <a:p>
-            <a:pPr algn="ctr"/>
-          </a:p>
-        </p:txBody>
-      </p:sp>
-      <p:sp>
-        <p:nvSpPr>
-          <p:cNvPr id="15" name="TextBox 14"/>
-          <p:cNvSpPr txBox="1"/>
-          <p:nvPr/>
-        </p:nvSpPr>
-        <p:spPr>
-          <a:xfrm>
-            <a:off x="6766560" y="2340864"/>
-            <a:ext cx="1783080" cy="201168"/>
-          </a:xfrm>
-          <a:prstGeom prst="rect">
-            <a:avLst/>
-          </a:prstGeom>
-          <a:noFill/>
-        </p:spPr>
-        <p:txBody>
-          <a:bodyPr wrap="square" lIns="27432" rIns="27432" tIns="9144">
-            <a:spAutoFit/>
-          </a:bodyPr>
-          <a:lstStyle/>
-          <a:p>
-            <a:pPr>
-              <a:defRPr sz="819" b="1">
-                <a:solidFill>
-                  <a:srgbClr val="5E6877"/>
-                </a:solidFill>
-              </a:defRPr>
-            </a:pPr>
-            <a:r>
-              <a:t>gradient_boosting</a:t>
-            </a:r>
-          </a:p>
-        </p:txBody>
-      </p:sp>
-      <p:sp>
-        <p:nvSpPr>
-          <p:cNvPr id="16" name="TextBox 15"/>
-          <p:cNvSpPr txBox="1"/>
-          <p:nvPr/>
-        </p:nvSpPr>
-        <p:spPr>
-          <a:xfrm>
-            <a:off x="6766560" y="2578608"/>
-            <a:ext cx="1783080" cy="384048"/>
-          </a:xfrm>
-          <a:prstGeom prst="rect">
-            <a:avLst/>
-          </a:prstGeom>
-          <a:noFill/>
-        </p:spPr>
-        <p:txBody>
-          <a:bodyPr wrap="square" lIns="27432" rIns="27432" tIns="9144">
-            <a:spAutoFit/>
-          </a:bodyPr>
-          <a:lstStyle/>
-          <a:p>
-            <a:pPr>
-              <a:defRPr sz="2000" b="1">
-                <a:solidFill>
-                  <a:srgbClr val="161C27"/>
-                </a:solidFill>
-              </a:defRPr>
-            </a:pPr>
-            <a:r>
-              <a:t>0.665</a:t>
-            </a:r>
-          </a:p>
-        </p:txBody>
-      </p:sp>
-      <p:sp>
-        <p:nvSpPr>
-          <p:cNvPr id="17" name="TextBox 16"/>
-          <p:cNvSpPr txBox="1"/>
-          <p:nvPr/>
-        </p:nvSpPr>
-        <p:spPr>
-          <a:xfrm>
-            <a:off x="6766560" y="2980944"/>
-            <a:ext cx="1783080" cy="-109728"/>
-          </a:xfrm>
-          <a:prstGeom prst="rect">
-            <a:avLst/>
-          </a:prstGeom>
-          <a:noFill/>
-        </p:spPr>
-        <p:txBody>
-          <a:bodyPr wrap="square" lIns="27432" rIns="27432" tIns="9144">
-            <a:spAutoFit/>
-          </a:bodyPr>
-          <a:lstStyle/>
-          <a:p>
-            <a:pPr>
-              <a:defRPr sz="919" b="0">
-                <a:solidFill>
-                  <a:srgbClr val="5E6877"/>
-                </a:solidFill>
-              </a:defRPr>
-            </a:pPr>
-            <a:r>
-              <a:t>F2 0.523 · Precision 0.681</a:t>
-            </a:r>
-          </a:p>
-        </p:txBody>
-      </p:sp>
-      <p:sp>
-        <p:nvSpPr>
-          <p:cNvPr id="18" name="Rectangle 17"/>
-          <p:cNvSpPr/>
-          <p:nvPr/>
-        </p:nvSpPr>
-        <p:spPr>
-          <a:xfrm>
-            <a:off x="6629400" y="3063239"/>
-            <a:ext cx="2057400" cy="713232"/>
-          </a:xfrm>
-          <a:prstGeom prst="rect">
-            <a:avLst/>
-          </a:prstGeom>
-          <a:solidFill>
-            <a:srgbClr val="FFFFFF"/>
-          </a:solidFill>
-          <a:ln>
-            <a:solidFill>
-              <a:srgbClr val="DCE2EB"/>
-            </a:solidFill>
-          </a:ln>
-        </p:spPr>
-        <p:style>
-          <a:lnRef idx="1">
-            <a:schemeClr val="accent1"/>
-          </a:lnRef>
-          <a:fillRef idx="3">
-            <a:schemeClr val="accent1"/>
-          </a:fillRef>
-          <a:effectRef idx="2">
-            <a:schemeClr val="accent1"/>
-          </a:effectRef>
-          <a:fontRef idx="minor">
-            <a:schemeClr val="lt1"/>
-          </a:fontRef>
-        </p:style>
-        <p:txBody>
-          <a:bodyPr rtlCol="0" anchor="ctr"/>
-          <a:lstStyle/>
-          <a:p>
-            <a:pPr algn="ctr"/>
-          </a:p>
-        </p:txBody>
-      </p:sp>
-      <p:sp>
-        <p:nvSpPr>
-          <p:cNvPr id="19" name="Rectangle 18"/>
-          <p:cNvSpPr/>
-          <p:nvPr/>
-        </p:nvSpPr>
-        <p:spPr>
-          <a:xfrm>
-            <a:off x="6629400" y="3063239"/>
-            <a:ext cx="2057400" cy="73152"/>
-          </a:xfrm>
-          <a:prstGeom prst="rect">
-            <a:avLst/>
-          </a:prstGeom>
-          <a:solidFill>
-            <a:srgbClr val="2356C2"/>
-          </a:solidFill>
-          <a:ln>
-            <a:noFill/>
-          </a:ln>
-        </p:spPr>
-        <p:style>
-          <a:lnRef idx="1">
-            <a:schemeClr val="accent1"/>
-          </a:lnRef>
-          <a:fillRef idx="3">
-            <a:schemeClr val="accent1"/>
-          </a:fillRef>
-          <a:effectRef idx="2">
-            <a:schemeClr val="accent1"/>
-          </a:effectRef>
-          <a:fontRef idx="minor">
-            <a:schemeClr val="lt1"/>
-          </a:fontRef>
-        </p:style>
-        <p:txBody>
-          <a:bodyPr rtlCol="0" anchor="ctr"/>
-          <a:lstStyle/>
-          <a:p>
-            <a:pPr algn="ctr"/>
-          </a:p>
-        </p:txBody>
-      </p:sp>
-      <p:sp>
-        <p:nvSpPr>
-          <p:cNvPr id="20" name="TextBox 19"/>
-          <p:cNvSpPr txBox="1"/>
-          <p:nvPr/>
-        </p:nvSpPr>
-        <p:spPr>
-          <a:xfrm>
-            <a:off x="6766560" y="3209544"/>
-            <a:ext cx="1783080" cy="201168"/>
-          </a:xfrm>
-          <a:prstGeom prst="rect">
-            <a:avLst/>
-          </a:prstGeom>
-          <a:noFill/>
-        </p:spPr>
-        <p:txBody>
-          <a:bodyPr wrap="square" lIns="27432" rIns="27432" tIns="9144">
-            <a:spAutoFit/>
-          </a:bodyPr>
-          <a:lstStyle/>
-          <a:p>
-            <a:pPr>
-              <a:defRPr sz="819" b="1">
-                <a:solidFill>
-                  <a:srgbClr val="5E6877"/>
-                </a:solidFill>
-              </a:defRPr>
-            </a:pPr>
-            <a:r>
-              <a:t>logistic_regression</a:t>
-            </a:r>
-          </a:p>
-        </p:txBody>
-      </p:sp>
-      <p:sp>
-        <p:nvSpPr>
-          <p:cNvPr id="21" name="TextBox 20"/>
-          <p:cNvSpPr txBox="1"/>
-          <p:nvPr/>
-        </p:nvSpPr>
-        <p:spPr>
-          <a:xfrm>
-            <a:off x="6766560" y="3447287"/>
-            <a:ext cx="1783080" cy="384048"/>
-          </a:xfrm>
-          <a:prstGeom prst="rect">
-            <a:avLst/>
-          </a:prstGeom>
-          <a:noFill/>
-        </p:spPr>
-        <p:txBody>
-          <a:bodyPr wrap="square" lIns="27432" rIns="27432" tIns="9144">
-            <a:spAutoFit/>
-          </a:bodyPr>
-          <a:lstStyle/>
-          <a:p>
-            <a:pPr>
-              <a:defRPr sz="2000" b="1">
-                <a:solidFill>
-                  <a:srgbClr val="161C27"/>
-                </a:solidFill>
-              </a:defRPr>
-            </a:pPr>
-            <a:r>
-              <a:t>0.663</a:t>
-            </a:r>
-          </a:p>
-        </p:txBody>
-      </p:sp>
-      <p:sp>
-        <p:nvSpPr>
-          <p:cNvPr id="22" name="TextBox 21"/>
-          <p:cNvSpPr txBox="1"/>
-          <p:nvPr/>
-        </p:nvSpPr>
-        <p:spPr>
-          <a:xfrm>
-            <a:off x="6766560" y="3849624"/>
-            <a:ext cx="1783080" cy="-109728"/>
-          </a:xfrm>
-          <a:prstGeom prst="rect">
-            <a:avLst/>
-          </a:prstGeom>
-          <a:noFill/>
-        </p:spPr>
-        <p:txBody>
-          <a:bodyPr wrap="square" lIns="27432" rIns="27432" tIns="9144">
-            <a:spAutoFit/>
-          </a:bodyPr>
-          <a:lstStyle/>
-          <a:p>
-            <a:pPr>
-              <a:defRPr sz="919" b="0">
-                <a:solidFill>
-                  <a:srgbClr val="5E6877"/>
-                </a:solidFill>
-              </a:defRPr>
-            </a:pPr>
-            <a:r>
-              <a:t>F2 0.718 · Precision 0.520</a:t>
-            </a:r>
-          </a:p>
-        </p:txBody>
-      </p:sp>
-      <p:sp>
-        <p:nvSpPr>
-          <p:cNvPr id="23" name="TextBox 22"/>
-          <p:cNvSpPr txBox="1"/>
-          <p:nvPr/>
-        </p:nvSpPr>
-        <p:spPr>
-          <a:xfrm>
-            <a:off x="6629400" y="3931920"/>
-            <a:ext cx="2057400" cy="640080"/>
-          </a:xfrm>
-          <a:prstGeom prst="rect">
-            <a:avLst/>
-          </a:prstGeom>
-          <a:noFill/>
-        </p:spPr>
-        <p:txBody>
-          <a:bodyPr wrap="square" lIns="27432" rIns="27432" tIns="9144">
-            <a:spAutoFit/>
-          </a:bodyPr>
-          <a:lstStyle/>
-          <a:p>
-            <a:pPr>
-              <a:defRPr sz="980" b="0">
-                <a:solidFill>
-                  <a:srgbClr val="5E6877"/>
-                </a:solidFill>
-              </a:defRPr>
-            </a:pPr>
-            <a:r>
-              <a:t>CatBoost gana por poco. Logistic y Gradient Boosting quedan cerca, por eso se reporta el ranking completo y no solo el ganador.</a:t>
+              <a:t>Conclusion: el ganador no se elige por marketing del algoritmo, sino por PR-AUC bajo la misma validacion.</a:t>
             </a:r>
           </a:p>
         </p:txBody>
@@ -11453,7 +12186,7 @@
               </a:defRPr>
             </a:pPr>
             <a:r>
-              <a:t>7 · MODELO FINAL</a:t>
+              <a:t>7 - MODELO FINAL</a:t>
             </a:r>
           </a:p>
         </p:txBody>
@@ -11488,7 +12221,7 @@
               </a:defRPr>
             </a:pPr>
             <a:r>
-              <a:t>CatBoost: mejor PR-AUC y umbral F2 = 0.31</a:t>
+              <a:t>CatBoost: buen ranking y umbral orientado a detectar churn</a:t>
             </a:r>
           </a:p>
         </p:txBody>
@@ -11536,8 +12269,8 @@
         </p:nvSpPr>
         <p:spPr>
           <a:xfrm>
-            <a:off x="548640" y="1234440"/>
-            <a:ext cx="1417320" cy="868680"/>
+            <a:off x="548640" y="1143000"/>
+            <a:ext cx="1417320" cy="777240"/>
           </a:xfrm>
           <a:prstGeom prst="rect">
             <a:avLst/>
@@ -11581,7 +12314,7 @@
         </p:nvSpPr>
         <p:spPr>
           <a:xfrm>
-            <a:off x="548640" y="1234440"/>
+            <a:off x="548640" y="1143000"/>
             <a:ext cx="1417320" cy="73152"/>
           </a:xfrm>
           <a:prstGeom prst="rect">
@@ -11624,7 +12357,7 @@
         </p:nvSpPr>
         <p:spPr>
           <a:xfrm>
-            <a:off x="685800" y="1380744"/>
+            <a:off x="685800" y="1289304"/>
             <a:ext cx="1143000" cy="201168"/>
           </a:xfrm>
           <a:prstGeom prst="rect">
@@ -11659,7 +12392,7 @@
         </p:nvSpPr>
         <p:spPr>
           <a:xfrm>
-            <a:off x="685800" y="1618488"/>
+            <a:off x="685800" y="1527048"/>
             <a:ext cx="1143000" cy="384048"/>
           </a:xfrm>
           <a:prstGeom prst="rect">
@@ -11694,8 +12427,8 @@
         </p:nvSpPr>
         <p:spPr>
           <a:xfrm>
-            <a:off x="685800" y="2020824"/>
-            <a:ext cx="1143000" cy="45719"/>
+            <a:off x="685800" y="1929384"/>
+            <a:ext cx="1143000" cy="-45720"/>
           </a:xfrm>
           <a:prstGeom prst="rect">
             <a:avLst/>
@@ -11729,8 +12462,8 @@
         </p:nvSpPr>
         <p:spPr>
           <a:xfrm>
-            <a:off x="2148840" y="1234440"/>
-            <a:ext cx="1417320" cy="868680"/>
+            <a:off x="2148840" y="1143000"/>
+            <a:ext cx="1417320" cy="777240"/>
           </a:xfrm>
           <a:prstGeom prst="rect">
             <a:avLst/>
@@ -11774,14 +12507,14 @@
         </p:nvSpPr>
         <p:spPr>
           <a:xfrm>
-            <a:off x="2148840" y="1234440"/>
+            <a:off x="2148840" y="1143000"/>
             <a:ext cx="1417320" cy="73152"/>
           </a:xfrm>
           <a:prstGeom prst="rect">
             <a:avLst/>
           </a:prstGeom>
           <a:solidFill>
-            <a:srgbClr val="2356C2"/>
+            <a:srgbClr val="3C9A60"/>
           </a:solidFill>
           <a:ln>
             <a:noFill/>
@@ -11817,7 +12550,7 @@
         </p:nvSpPr>
         <p:spPr>
           <a:xfrm>
-            <a:off x="2286000" y="1380744"/>
+            <a:off x="2286000" y="1289304"/>
             <a:ext cx="1143000" cy="201168"/>
           </a:xfrm>
           <a:prstGeom prst="rect">
@@ -11839,7 +12572,7 @@
               </a:defRPr>
             </a:pPr>
             <a:r>
-              <a:t>ROC-AUC</a:t>
+              <a:t>Recall</a:t>
             </a:r>
           </a:p>
         </p:txBody>
@@ -11852,7 +12585,7 @@
         </p:nvSpPr>
         <p:spPr>
           <a:xfrm>
-            <a:off x="2286000" y="1618488"/>
+            <a:off x="2286000" y="1527048"/>
             <a:ext cx="1143000" cy="384048"/>
           </a:xfrm>
           <a:prstGeom prst="rect">
@@ -11874,7 +12607,7 @@
               </a:defRPr>
             </a:pPr>
             <a:r>
-              <a:t>0.845</a:t>
+              <a:t>90.9%</a:t>
             </a:r>
           </a:p>
         </p:txBody>
@@ -11887,8 +12620,8 @@
         </p:nvSpPr>
         <p:spPr>
           <a:xfrm>
-            <a:off x="2286000" y="2020824"/>
-            <a:ext cx="1143000" cy="45719"/>
+            <a:off x="2286000" y="1929384"/>
+            <a:ext cx="1143000" cy="-45720"/>
           </a:xfrm>
           <a:prstGeom prst="rect">
             <a:avLst/>
@@ -11922,8 +12655,8 @@
         </p:nvSpPr>
         <p:spPr>
           <a:xfrm>
-            <a:off x="3749039" y="1234440"/>
-            <a:ext cx="1417320" cy="868680"/>
+            <a:off x="3749039" y="1143000"/>
+            <a:ext cx="1417320" cy="777240"/>
           </a:xfrm>
           <a:prstGeom prst="rect">
             <a:avLst/>
@@ -11967,14 +12700,14 @@
         </p:nvSpPr>
         <p:spPr>
           <a:xfrm>
-            <a:off x="3749039" y="1234440"/>
+            <a:off x="3749039" y="1143000"/>
             <a:ext cx="1417320" cy="73152"/>
           </a:xfrm>
           <a:prstGeom prst="rect">
             <a:avLst/>
           </a:prstGeom>
           <a:solidFill>
-            <a:srgbClr val="3C9A60"/>
+            <a:srgbClr val="C84752"/>
           </a:solidFill>
           <a:ln>
             <a:noFill/>
@@ -12010,7 +12743,7 @@
         </p:nvSpPr>
         <p:spPr>
           <a:xfrm>
-            <a:off x="3886200" y="1380744"/>
+            <a:off x="3886200" y="1289304"/>
             <a:ext cx="1143000" cy="201168"/>
           </a:xfrm>
           <a:prstGeom prst="rect">
@@ -12032,7 +12765,7 @@
               </a:defRPr>
             </a:pPr>
             <a:r>
-              <a:t>Recall</a:t>
+              <a:t>Precision</a:t>
             </a:r>
           </a:p>
         </p:txBody>
@@ -12045,7 +12778,7 @@
         </p:nvSpPr>
         <p:spPr>
           <a:xfrm>
-            <a:off x="3886200" y="1618488"/>
+            <a:off x="3886200" y="1527048"/>
             <a:ext cx="1143000" cy="384048"/>
           </a:xfrm>
           <a:prstGeom prst="rect">
@@ -12067,7 +12800,7 @@
               </a:defRPr>
             </a:pPr>
             <a:r>
-              <a:t>90.9%</a:t>
+              <a:t>42.4%</a:t>
             </a:r>
           </a:p>
         </p:txBody>
@@ -12080,8 +12813,8 @@
         </p:nvSpPr>
         <p:spPr>
           <a:xfrm>
-            <a:off x="3886200" y="2020824"/>
-            <a:ext cx="1143000" cy="45719"/>
+            <a:off x="3886200" y="1929384"/>
+            <a:ext cx="1143000" cy="-45720"/>
           </a:xfrm>
           <a:prstGeom prst="rect">
             <a:avLst/>
@@ -12102,7 +12835,7 @@
               </a:defRPr>
             </a:pPr>
             <a:r>
-              <a:t>detecta churn</a:t>
+              <a:t>test</a:t>
             </a:r>
           </a:p>
         </p:txBody>
@@ -12115,8 +12848,8 @@
         </p:nvSpPr>
         <p:spPr>
           <a:xfrm>
-            <a:off x="5349240" y="1234440"/>
-            <a:ext cx="1417320" cy="868680"/>
+            <a:off x="5349240" y="1143000"/>
+            <a:ext cx="1417320" cy="777240"/>
           </a:xfrm>
           <a:prstGeom prst="rect">
             <a:avLst/>
@@ -12160,14 +12893,14 @@
         </p:nvSpPr>
         <p:spPr>
           <a:xfrm>
-            <a:off x="5349240" y="1234440"/>
+            <a:off x="5349240" y="1143000"/>
             <a:ext cx="1417320" cy="73152"/>
           </a:xfrm>
           <a:prstGeom prst="rect">
             <a:avLst/>
           </a:prstGeom>
           <a:solidFill>
-            <a:srgbClr val="C84752"/>
+            <a:srgbClr val="2356C2"/>
           </a:solidFill>
           <a:ln>
             <a:noFill/>
@@ -12203,7 +12936,7 @@
         </p:nvSpPr>
         <p:spPr>
           <a:xfrm>
-            <a:off x="5486400" y="1380744"/>
+            <a:off x="5486400" y="1289304"/>
             <a:ext cx="1143000" cy="201168"/>
           </a:xfrm>
           <a:prstGeom prst="rect">
@@ -12225,7 +12958,7 @@
               </a:defRPr>
             </a:pPr>
             <a:r>
-              <a:t>Precision</a:t>
+              <a:t>F2</a:t>
             </a:r>
           </a:p>
         </p:txBody>
@@ -12238,7 +12971,7 @@
         </p:nvSpPr>
         <p:spPr>
           <a:xfrm>
-            <a:off x="5486400" y="1618488"/>
+            <a:off x="5486400" y="1527048"/>
             <a:ext cx="1143000" cy="384048"/>
           </a:xfrm>
           <a:prstGeom prst="rect">
@@ -12260,7 +12993,7 @@
               </a:defRPr>
             </a:pPr>
             <a:r>
-              <a:t>42.4%</a:t>
+              <a:t>0.740</a:t>
             </a:r>
           </a:p>
         </p:txBody>
@@ -12273,8 +13006,8 @@
         </p:nvSpPr>
         <p:spPr>
           <a:xfrm>
-            <a:off x="5486400" y="2020824"/>
-            <a:ext cx="1143000" cy="45719"/>
+            <a:off x="5486400" y="1929384"/>
+            <a:ext cx="1143000" cy="-45720"/>
           </a:xfrm>
           <a:prstGeom prst="rect">
             <a:avLst/>
@@ -12295,7 +13028,7 @@
               </a:defRPr>
             </a:pPr>
             <a:r>
-              <a:t>contactos utiles</a:t>
+              <a:t>umbral 0.31</a:t>
             </a:r>
           </a:p>
         </p:txBody>
@@ -12308,8 +13041,8 @@
         </p:nvSpPr>
         <p:spPr>
           <a:xfrm>
-            <a:off x="6949440" y="1234440"/>
-            <a:ext cx="1417320" cy="868680"/>
+            <a:off x="6949440" y="1143000"/>
+            <a:ext cx="1417320" cy="777240"/>
           </a:xfrm>
           <a:prstGeom prst="rect">
             <a:avLst/>
@@ -12353,14 +13086,14 @@
         </p:nvSpPr>
         <p:spPr>
           <a:xfrm>
-            <a:off x="6949440" y="1234440"/>
+            <a:off x="6949440" y="1143000"/>
             <a:ext cx="1417320" cy="73152"/>
           </a:xfrm>
           <a:prstGeom prst="rect">
             <a:avLst/>
           </a:prstGeom>
           <a:solidFill>
-            <a:srgbClr val="229799"/>
+            <a:srgbClr val="6856CC"/>
           </a:solidFill>
           <a:ln>
             <a:noFill/>
@@ -12396,7 +13129,7 @@
         </p:nvSpPr>
         <p:spPr>
           <a:xfrm>
-            <a:off x="7086600" y="1380744"/>
+            <a:off x="7086600" y="1289304"/>
             <a:ext cx="1143000" cy="201168"/>
           </a:xfrm>
           <a:prstGeom prst="rect">
@@ -12418,7 +13151,7 @@
               </a:defRPr>
             </a:pPr>
             <a:r>
-              <a:t>F2</a:t>
+              <a:t>Accionados</a:t>
             </a:r>
           </a:p>
         </p:txBody>
@@ -12431,7 +13164,7 @@
         </p:nvSpPr>
         <p:spPr>
           <a:xfrm>
-            <a:off x="7086600" y="1618488"/>
+            <a:off x="7086600" y="1527048"/>
             <a:ext cx="1143000" cy="384048"/>
           </a:xfrm>
           <a:prstGeom prst="rect">
@@ -12453,7 +13186,7 @@
               </a:defRPr>
             </a:pPr>
             <a:r>
-              <a:t>0.740</a:t>
+              <a:t>56.8%</a:t>
             </a:r>
           </a:p>
         </p:txBody>
@@ -12466,8 +13199,8 @@
         </p:nvSpPr>
         <p:spPr>
           <a:xfrm>
-            <a:off x="7086600" y="2020824"/>
-            <a:ext cx="1143000" cy="45719"/>
+            <a:off x="7086600" y="1929384"/>
+            <a:ext cx="1143000" cy="-45720"/>
           </a:xfrm>
           <a:prstGeom prst="rect">
             <a:avLst/>
@@ -12488,7 +13221,7 @@
               </a:defRPr>
             </a:pPr>
             <a:r>
-              <a:t>umbral</a:t>
+              <a:t>del test</a:t>
             </a:r>
           </a:p>
         </p:txBody>
@@ -12509,8 +13242,8 @@
         </p:blipFill>
         <p:spPr>
           <a:xfrm>
-            <a:off x="685800" y="2514600"/>
-            <a:ext cx="4754880" cy="2462404"/>
+            <a:off x="566928" y="2240280"/>
+            <a:ext cx="4434840" cy="2296665"/>
           </a:xfrm>
           <a:prstGeom prst="rect">
             <a:avLst/>
@@ -12519,7 +13252,7 @@
       </p:pic>
       <p:pic>
         <p:nvPicPr>
-          <p:cNvPr id="33" name="Picture 32" descr="capture_curve.png"/>
+          <p:cNvPr id="33" name="Picture 32" descr="confusion_matrix.png"/>
           <p:cNvPicPr>
             <a:picLocks noChangeAspect="1"/>
           </p:cNvPicPr>
@@ -12533,14 +13266,49 @@
         </p:blipFill>
         <p:spPr>
           <a:xfrm>
-            <a:off x="5440680" y="2514600"/>
-            <a:ext cx="3154680" cy="1719754"/>
+            <a:off x="5440680" y="2057400"/>
+            <a:ext cx="2788920" cy="2209552"/>
           </a:xfrm>
           <a:prstGeom prst="rect">
             <a:avLst/>
           </a:prstGeom>
         </p:spPr>
       </p:pic>
+      <p:sp>
+        <p:nvSpPr>
+          <p:cNvPr id="34" name="TextBox 33"/>
+          <p:cNvSpPr txBox="1"/>
+          <p:nvPr/>
+        </p:nvSpPr>
+        <p:spPr>
+          <a:xfrm>
+            <a:off x="749808" y="4462272"/>
+            <a:ext cx="7589520" cy="292608"/>
+          </a:xfrm>
+          <a:prstGeom prst="rect">
+            <a:avLst/>
+          </a:prstGeom>
+          <a:noFill/>
+        </p:spPr>
+        <p:txBody>
+          <a:bodyPr wrap="square" lIns="27432" rIns="27432" tIns="9144">
+            <a:spAutoFit/>
+          </a:bodyPr>
+          <a:lstStyle/>
+          <a:p>
+            <a:pPr>
+              <a:defRPr sz="950" b="0">
+                <a:solidFill>
+                  <a:srgbClr val="5E6877"/>
+                </a:solidFill>
+              </a:defRPr>
+            </a:pPr>
+            <a:r>
+              <a:t>El umbral 0.31 prioriza recall: captura gran parte de los churners, a costa de falsos positivos. En negocio real, el corte deberia ajustarse por costo/capacidad.</a:t>
+            </a:r>
+          </a:p>
+        </p:txBody>
+      </p:sp>
     </p:spTree>
   </p:cSld>
   <p:clrMapOvr>
